--- a/Sosialisasi_BelajarPlus_Kepala_Sekolah.pptx
+++ b/Sosialisasi_BelajarPlus_Kepala_Sekolah.pptx
@@ -1836,7 +1836,7 @@
     <p:bg>
       <p:bgPr>
         <a:solidFill>
-          <a:srgbClr val="0A0F1D"/>
+          <a:srgbClr val="F8FAFC"/>
         </a:solidFill>
       </p:bgPr>
     </p:bg>
@@ -1869,11 +1869,11 @@
             <a:avLst/>
           </a:prstGeom>
           <a:solidFill>
-            <a:srgbClr val="2563EB"/>
+            <a:srgbClr val="0284C7"/>
           </a:solidFill>
           <a:ln w="12700">
             <a:solidFill>
-              <a:srgbClr val="2563EB"/>
+              <a:srgbClr val="0284C7"/>
             </a:solidFill>
             <a:prstDash val="solid"/>
           </a:ln>
@@ -1895,8 +1895,8 @@
         </p:blipFill>
         <p:spPr>
           <a:xfrm>
-            <a:off x="731520" y="640080"/>
-            <a:ext cx="2560320" cy="640080"/>
+            <a:off x="731520" y="594360"/>
+            <a:ext cx="2743200" cy="685800"/>
           </a:xfrm>
           <a:prstGeom prst="rect">
             <a:avLst/>
@@ -1912,17 +1912,17 @@
         <p:spPr>
           <a:xfrm>
             <a:off x="731520" y="1508760"/>
-            <a:ext cx="4937760" cy="347472"/>
+            <a:ext cx="5120640" cy="365760"/>
           </a:xfrm>
           <a:prstGeom prst="roundRect">
             <a:avLst/>
           </a:prstGeom>
           <a:solidFill>
-            <a:srgbClr val="0F172A"/>
+            <a:srgbClr val="E0F2FE"/>
           </a:solidFill>
           <a:ln w="15240">
             <a:solidFill>
-              <a:srgbClr val="2563EB"/>
+              <a:srgbClr val="BAE6FD"/>
             </a:solidFill>
             <a:prstDash val="solid"/>
           </a:ln>
@@ -1937,7 +1937,7 @@
         <p:spPr>
           <a:xfrm>
             <a:off x="731520" y="1508760"/>
-            <a:ext cx="4937760" cy="347472"/>
+            <a:ext cx="5120640" cy="365760"/>
           </a:xfrm>
           <a:prstGeom prst="rect">
             <a:avLst/>
@@ -1953,9 +1953,9 @@
               <a:buNone/>
             </a:pPr>
             <a:r>
-              <a:rPr lang="en-US" sz="900" b="1" dirty="0">
-                <a:solidFill>
-                  <a:srgbClr val="38BDF8"/>
+              <a:rPr lang="en-US" sz="950" b="1" dirty="0">
+                <a:solidFill>
+                  <a:srgbClr val="0369A1"/>
                 </a:solidFill>
                 <a:latin typeface="Arial" pitchFamily="34" charset="0"/>
                 <a:ea typeface="Arial" pitchFamily="34" charset="-122"/>
@@ -1963,7 +1963,7 @@
               </a:rPr>
               <a:t>✨ PROGRAM KEMITRAAN RESMI PERPUSTAKAAN DIGITAL SEKOLAH</a:t>
             </a:r>
-            <a:endParaRPr lang="en-US" sz="900" dirty="0"/>
+            <a:endParaRPr lang="en-US" sz="950" dirty="0"/>
           </a:p>
         </p:txBody>
       </p:sp>
@@ -1997,7 +1997,7 @@
             <a:r>
               <a:rPr lang="en-US" sz="2700" b="1" dirty="0">
                 <a:solidFill>
-                  <a:srgbClr val="FFFFFF"/>
+                  <a:srgbClr val="0F172A"/>
                 </a:solidFill>
                 <a:latin typeface="Arial" pitchFamily="34" charset="0"/>
                 <a:ea typeface="Arial" pitchFamily="34" charset="-122"/>
@@ -2017,7 +2017,7 @@
             <a:r>
               <a:rPr lang="en-US" sz="2700" b="1" dirty="0">
                 <a:solidFill>
-                  <a:srgbClr val="FFFFFF"/>
+                  <a:srgbClr val="0F172A"/>
                 </a:solidFill>
                 <a:latin typeface="Arial" pitchFamily="34" charset="0"/>
                 <a:ea typeface="Arial" pitchFamily="34" charset="-122"/>
@@ -2059,7 +2059,7 @@
             <a:r>
               <a:rPr lang="en-US" sz="1250" dirty="0">
                 <a:solidFill>
-                  <a:srgbClr val="94A3B8"/>
+                  <a:srgbClr val="334155"/>
                 </a:solidFill>
                 <a:latin typeface="Arial" pitchFamily="34" charset="0"/>
                 <a:ea typeface="Arial" pitchFamily="34" charset="-122"/>
@@ -2079,7 +2079,7 @@
             <a:r>
               <a:rPr lang="en-US" sz="1250" dirty="0">
                 <a:solidFill>
-                  <a:srgbClr val="94A3B8"/>
+                  <a:srgbClr val="334155"/>
                 </a:solidFill>
                 <a:latin typeface="Arial" pitchFamily="34" charset="0"/>
                 <a:ea typeface="Arial" pitchFamily="34" charset="-122"/>
@@ -2100,17 +2100,17 @@
         <p:spPr>
           <a:xfrm>
             <a:off x="731520" y="4434840"/>
-            <a:ext cx="6217920" cy="1645920"/>
+            <a:ext cx="6217920" cy="1691640"/>
           </a:xfrm>
           <a:prstGeom prst="roundRect">
             <a:avLst/>
           </a:prstGeom>
           <a:solidFill>
-            <a:srgbClr val="131E32"/>
+            <a:srgbClr val="FFFFFF"/>
           </a:solidFill>
           <a:ln w="15240">
             <a:solidFill>
-              <a:srgbClr val="1E293B"/>
+              <a:srgbClr val="CBD5E1"/>
             </a:solidFill>
             <a:prstDash val="solid"/>
           </a:ln>
@@ -2125,7 +2125,7 @@
         <p:spPr>
           <a:xfrm>
             <a:off x="960120" y="4572000"/>
-            <a:ext cx="5760720" cy="1371600"/>
+            <a:ext cx="5760720" cy="1417320"/>
           </a:xfrm>
           <a:prstGeom prst="rect">
             <a:avLst/>
@@ -2146,7 +2146,7 @@
             <a:r>
               <a:rPr lang="en-US" sz="1100" b="1" dirty="0">
                 <a:solidFill>
-                  <a:srgbClr val="F59E0B"/>
+                  <a:srgbClr val="D97706"/>
                 </a:solidFill>
                 <a:latin typeface="Arial" pitchFamily="34" charset="0"/>
                 <a:ea typeface="Arial" pitchFamily="34" charset="-122"/>
@@ -2163,7 +2163,7 @@
             <a:r>
               <a:rPr lang="en-US" sz="1050" dirty="0">
                 <a:solidFill>
-                  <a:srgbClr val="FFFFFF"/>
+                  <a:srgbClr val="0F172A"/>
                 </a:solidFill>
                 <a:latin typeface="Arial" pitchFamily="34" charset="0"/>
                 <a:ea typeface="Arial" pitchFamily="34" charset="-122"/>
@@ -2181,7 +2181,7 @@
             <a:r>
               <a:rPr lang="en-US" sz="1100" b="1" dirty="0">
                 <a:solidFill>
-                  <a:srgbClr val="38BDF8"/>
+                  <a:srgbClr val="0284C7"/>
                 </a:solidFill>
                 <a:latin typeface="Arial" pitchFamily="34" charset="0"/>
                 <a:ea typeface="Arial" pitchFamily="34" charset="-122"/>
@@ -2198,7 +2198,7 @@
             <a:r>
               <a:rPr lang="en-US" sz="1050" dirty="0">
                 <a:solidFill>
-                  <a:srgbClr val="94A3B8"/>
+                  <a:srgbClr val="334155"/>
                 </a:solidFill>
                 <a:latin typeface="Arial" pitchFamily="34" charset="0"/>
                 <a:ea typeface="Arial" pitchFamily="34" charset="-122"/>
@@ -2216,7 +2216,7 @@
             <a:r>
               <a:rPr lang="en-US" sz="1100" b="1" dirty="0">
                 <a:solidFill>
-                  <a:srgbClr val="10B981"/>
+                  <a:srgbClr val="059669"/>
                 </a:solidFill>
                 <a:latin typeface="Arial" pitchFamily="34" charset="0"/>
                 <a:ea typeface="Arial" pitchFamily="34" charset="-122"/>
@@ -2233,7 +2233,7 @@
             <a:r>
               <a:rPr lang="en-US" sz="1050" dirty="0">
                 <a:solidFill>
-                  <a:srgbClr val="94A3B8"/>
+                  <a:srgbClr val="334155"/>
                 </a:solidFill>
                 <a:latin typeface="Arial" pitchFamily="34" charset="0"/>
                 <a:ea typeface="Arial" pitchFamily="34" charset="-122"/>
@@ -2260,11 +2260,11 @@
             <a:avLst/>
           </a:prstGeom>
           <a:solidFill>
-            <a:srgbClr val="0F172A"/>
+            <a:srgbClr val="FFFFFF"/>
           </a:solidFill>
           <a:ln w="19050">
             <a:solidFill>
-              <a:srgbClr val="334155"/>
+              <a:srgbClr val="CBD5E1"/>
             </a:solidFill>
             <a:prstDash val="solid"/>
           </a:ln>
@@ -2279,17 +2279,17 @@
         <p:spPr>
           <a:xfrm>
             <a:off x="7315200" y="1188720"/>
-            <a:ext cx="4206240" cy="320040"/>
-          </a:xfrm>
-          <a:prstGeom prst="rect">
-            <a:avLst/>
-          </a:prstGeom>
-          <a:solidFill>
-            <a:srgbClr val="1E293B"/>
+            <a:ext cx="4206240" cy="347472"/>
+          </a:xfrm>
+          <a:prstGeom prst="rect">
+            <a:avLst/>
+          </a:prstGeom>
+          <a:solidFill>
+            <a:srgbClr val="F1F5F9"/>
           </a:solidFill>
           <a:ln w="12700">
             <a:solidFill>
-              <a:srgbClr val="1E293B"/>
+              <a:srgbClr val="E2E8F0"/>
             </a:solidFill>
             <a:prstDash val="solid"/>
           </a:ln>
@@ -2303,7 +2303,7 @@
         </p:nvSpPr>
         <p:spPr>
           <a:xfrm>
-            <a:off x="7452360" y="1289304"/>
+            <a:off x="7452360" y="1298448"/>
             <a:ext cx="118872" cy="118872"/>
           </a:xfrm>
           <a:prstGeom prst="ellipse">
@@ -2328,7 +2328,7 @@
         </p:nvSpPr>
         <p:spPr>
           <a:xfrm>
-            <a:off x="7635240" y="1289304"/>
+            <a:off x="7635240" y="1298448"/>
             <a:ext cx="118872" cy="118872"/>
           </a:xfrm>
           <a:prstGeom prst="ellipse">
@@ -2353,7 +2353,7 @@
         </p:nvSpPr>
         <p:spPr>
           <a:xfrm>
-            <a:off x="7818120" y="1289304"/>
+            <a:off x="7818120" y="1298448"/>
             <a:ext cx="118872" cy="118872"/>
           </a:xfrm>
           <a:prstGeom prst="ellipse">
@@ -2379,17 +2379,17 @@
         <p:spPr>
           <a:xfrm>
             <a:off x="8092440" y="1252728"/>
-            <a:ext cx="3291840" cy="201168"/>
+            <a:ext cx="3291840" cy="219456"/>
           </a:xfrm>
           <a:prstGeom prst="roundRect">
             <a:avLst/>
           </a:prstGeom>
           <a:solidFill>
-            <a:srgbClr val="0F172A"/>
+            <a:srgbClr val="FFFFFF"/>
           </a:solidFill>
           <a:ln w="10160">
             <a:solidFill>
-              <a:srgbClr val="334155"/>
+              <a:srgbClr val="CBD5E1"/>
             </a:solidFill>
             <a:prstDash val="solid"/>
           </a:ln>
@@ -2404,7 +2404,7 @@
         <p:spPr>
           <a:xfrm>
             <a:off x="8183880" y="1252728"/>
-            <a:ext cx="3108960" cy="201168"/>
+            <a:ext cx="3108960" cy="219456"/>
           </a:xfrm>
           <a:prstGeom prst="rect">
             <a:avLst/>
@@ -2420,7 +2420,7 @@
               <a:buNone/>
             </a:pPr>
             <a:r>
-              <a:rPr lang="en-US" sz="750" dirty="0">
+              <a:rPr lang="en-US" sz="800" dirty="0">
                 <a:solidFill>
                   <a:srgbClr val="64748B"/>
                 </a:solidFill>
@@ -2428,9 +2428,9 @@
                 <a:ea typeface="Arial" pitchFamily="34" charset="-122"/>
                 <a:cs typeface="Arial" pitchFamily="34" charset="-120"/>
               </a:rPr>
-              <a:t>https://belajarplus.id/admin</a:t>
-            </a:r>
-            <a:endParaRPr lang="en-US" sz="750" dirty="0"/>
+              <a:t>🔒 https://belajarplus.id/admin</a:t>
+            </a:r>
+            <a:endParaRPr lang="en-US" sz="800" dirty="0"/>
           </a:p>
         </p:txBody>
       </p:sp>
@@ -2449,8 +2449,8 @@
         </p:blipFill>
         <p:spPr>
           <a:xfrm>
-            <a:off x="7360920" y="1527048"/>
-            <a:ext cx="4114800" cy="4507992"/>
+            <a:off x="7360920" y="1554480"/>
+            <a:ext cx="4114800" cy="4480560"/>
           </a:xfrm>
           <a:prstGeom prst="rect">
             <a:avLst/>
@@ -2471,7 +2471,7 @@
     <p:bg>
       <p:bgPr>
         <a:solidFill>
-          <a:srgbClr val="0A0F1D"/>
+          <a:srgbClr val="F8FAFC"/>
         </a:solidFill>
       </p:bgPr>
     </p:bg>
@@ -2504,11 +2504,11 @@
             <a:avLst/>
           </a:prstGeom>
           <a:solidFill>
-            <a:srgbClr val="2563EB"/>
+            <a:srgbClr val="0284C7"/>
           </a:solidFill>
           <a:ln w="12700">
             <a:solidFill>
-              <a:srgbClr val="2563EB"/>
+              <a:srgbClr val="0284C7"/>
             </a:solidFill>
             <a:prstDash val="solid"/>
           </a:ln>
@@ -2530,8 +2530,8 @@
         </p:blipFill>
         <p:spPr>
           <a:xfrm>
-            <a:off x="640080" y="228600"/>
-            <a:ext cx="1828800" cy="457200"/>
+            <a:off x="640080" y="201168"/>
+            <a:ext cx="1920240" cy="475488"/>
           </a:xfrm>
           <a:prstGeom prst="rect">
             <a:avLst/>
@@ -2546,32 +2546,96 @@
         </p:nvSpPr>
         <p:spPr>
           <a:xfrm>
-            <a:off x="2743200" y="274320"/>
+            <a:off x="2834640" y="256032"/>
+            <a:ext cx="3017520" cy="347472"/>
+          </a:xfrm>
+          <a:prstGeom prst="roundRect">
+            <a:avLst/>
+          </a:prstGeom>
+          <a:solidFill>
+            <a:srgbClr val="E0F2FE"/>
+          </a:solidFill>
+          <a:ln w="15240">
+            <a:solidFill>
+              <a:srgbClr val="BAE6FD"/>
+            </a:solidFill>
+            <a:prstDash val="solid"/>
+          </a:ln>
+        </p:spPr>
+      </p:sp>
+      <p:sp>
+        <p:nvSpPr>
+          <p:cNvPr id="5" name="Text 2"/>
+          <p:cNvSpPr/>
+          <p:nvPr/>
+        </p:nvSpPr>
+        <p:spPr>
+          <a:xfrm>
+            <a:off x="2834640" y="256032"/>
+            <a:ext cx="3017520" cy="347472"/>
+          </a:xfrm>
+          <a:prstGeom prst="rect">
+            <a:avLst/>
+          </a:prstGeom>
+          <a:noFill/>
+          <a:ln/>
+        </p:spPr>
+        <p:txBody>
+          <a:bodyPr wrap="square" rtlCol="0" anchor="ctr"/>
+          <a:lstStyle/>
+          <a:p>
+            <a:pPr algn="ctr" indent="0" marL="0">
+              <a:buNone/>
+            </a:pPr>
+            <a:r>
+              <a:rPr lang="en-US" sz="950" b="1" dirty="0">
+                <a:solidFill>
+                  <a:srgbClr val="0369A1"/>
+                </a:solidFill>
+                <a:latin typeface="Arial" pitchFamily="34" charset="0"/>
+                <a:ea typeface="Arial" pitchFamily="34" charset="-122"/>
+                <a:cs typeface="Arial" pitchFamily="34" charset="-120"/>
+              </a:rPr>
+              <a:t>KEAMANAN &amp; DISIPLIN</a:t>
+            </a:r>
+            <a:endParaRPr lang="en-US" sz="950" dirty="0"/>
+          </a:p>
+        </p:txBody>
+      </p:sp>
+      <p:sp>
+        <p:nvSpPr>
+          <p:cNvPr id="6" name="Shape 3"/>
+          <p:cNvSpPr/>
+          <p:nvPr/>
+        </p:nvSpPr>
+        <p:spPr>
+          <a:xfrm>
+            <a:off x="8595360" y="256032"/>
             <a:ext cx="2926080" cy="347472"/>
           </a:xfrm>
           <a:prstGeom prst="roundRect">
             <a:avLst/>
           </a:prstGeom>
           <a:solidFill>
-            <a:srgbClr val="0F172A"/>
+            <a:srgbClr val="FEF3C7"/>
           </a:solidFill>
           <a:ln w="15240">
             <a:solidFill>
-              <a:srgbClr val="2563EB"/>
-            </a:solidFill>
-            <a:prstDash val="solid"/>
-          </a:ln>
-        </p:spPr>
-      </p:sp>
-      <p:sp>
-        <p:nvSpPr>
-          <p:cNvPr id="5" name="Text 2"/>
-          <p:cNvSpPr/>
-          <p:nvPr/>
-        </p:nvSpPr>
-        <p:spPr>
-          <a:xfrm>
-            <a:off x="2743200" y="274320"/>
+              <a:srgbClr val="FCD34D"/>
+            </a:solidFill>
+            <a:prstDash val="solid"/>
+          </a:ln>
+        </p:spPr>
+      </p:sp>
+      <p:sp>
+        <p:nvSpPr>
+          <p:cNvPr id="7" name="Text 4"/>
+          <p:cNvSpPr/>
+          <p:nvPr/>
+        </p:nvSpPr>
+        <p:spPr>
+          <a:xfrm>
+            <a:off x="8595360" y="256032"/>
             <a:ext cx="2926080" cy="347472"/>
           </a:xfrm>
           <a:prstGeom prst="rect">
@@ -2588,73 +2652,9 @@
               <a:buNone/>
             </a:pPr>
             <a:r>
-              <a:rPr lang="en-US" sz="900" b="1" dirty="0">
-                <a:solidFill>
-                  <a:srgbClr val="38BDF8"/>
-                </a:solidFill>
-                <a:latin typeface="Arial" pitchFamily="34" charset="0"/>
-                <a:ea typeface="Arial" pitchFamily="34" charset="-122"/>
-                <a:cs typeface="Arial" pitchFamily="34" charset="-120"/>
-              </a:rPr>
-              <a:t>KEAMANAN &amp; DISIPLIN</a:t>
-            </a:r>
-            <a:endParaRPr lang="en-US" sz="900" dirty="0"/>
-          </a:p>
-        </p:txBody>
-      </p:sp>
-      <p:sp>
-        <p:nvSpPr>
-          <p:cNvPr id="6" name="Shape 3"/>
-          <p:cNvSpPr/>
-          <p:nvPr/>
-        </p:nvSpPr>
-        <p:spPr>
-          <a:xfrm>
-            <a:off x="8778240" y="274320"/>
-            <a:ext cx="2743200" cy="347472"/>
-          </a:xfrm>
-          <a:prstGeom prst="roundRect">
-            <a:avLst/>
-          </a:prstGeom>
-          <a:solidFill>
-            <a:srgbClr val="1C1917"/>
-          </a:solidFill>
-          <a:ln w="15240">
-            <a:solidFill>
-              <a:srgbClr val="F59E0B"/>
-            </a:solidFill>
-            <a:prstDash val="solid"/>
-          </a:ln>
-        </p:spPr>
-      </p:sp>
-      <p:sp>
-        <p:nvSpPr>
-          <p:cNvPr id="7" name="Text 4"/>
-          <p:cNvSpPr/>
-          <p:nvPr/>
-        </p:nvSpPr>
-        <p:spPr>
-          <a:xfrm>
-            <a:off x="8778240" y="274320"/>
-            <a:ext cx="2743200" cy="347472"/>
-          </a:xfrm>
-          <a:prstGeom prst="rect">
-            <a:avLst/>
-          </a:prstGeom>
-          <a:noFill/>
-          <a:ln/>
-        </p:spPr>
-        <p:txBody>
-          <a:bodyPr wrap="square" rtlCol="0" anchor="ctr"/>
-          <a:lstStyle/>
-          <a:p>
-            <a:pPr algn="ctr" indent="0" marL="0">
-              <a:buNone/>
-            </a:pPr>
-            <a:r>
-              <a:rPr lang="en-US" sz="900" b="1" dirty="0">
-                <a:solidFill>
-                  <a:srgbClr val="F59E0B"/>
+              <a:rPr lang="en-US" sz="950" b="1" dirty="0">
+                <a:solidFill>
+                  <a:srgbClr val="D97706"/>
                 </a:solidFill>
                 <a:latin typeface="Arial" pitchFamily="34" charset="0"/>
                 <a:ea typeface="Arial" pitchFamily="34" charset="-122"/>
@@ -2662,7 +2662,7 @@
               </a:rPr>
               <a:t>👑 Sesi Khusus Kepala Sekolah</a:t>
             </a:r>
-            <a:endParaRPr lang="en-US" sz="900" dirty="0"/>
+            <a:endParaRPr lang="en-US" sz="950" dirty="0"/>
           </a:p>
         </p:txBody>
       </p:sp>
@@ -2693,7 +2693,7 @@
             <a:r>
               <a:rPr lang="en-US" sz="2200" b="1" dirty="0">
                 <a:solidFill>
-                  <a:srgbClr val="FFFFFF"/>
+                  <a:srgbClr val="0F172A"/>
                 </a:solidFill>
                 <a:latin typeface="Arial" pitchFamily="34" charset="0"/>
                 <a:ea typeface="Arial" pitchFamily="34" charset="-122"/>
@@ -2722,7 +2722,7 @@
           <a:noFill/>
           <a:ln w="15240">
             <a:solidFill>
-              <a:srgbClr val="1E293B"/>
+              <a:srgbClr val="E2E8F0"/>
             </a:solidFill>
             <a:prstDash val="solid"/>
           </a:ln>
@@ -2794,7 +2794,7 @@
             <a:r>
               <a:rPr lang="en-US" sz="900" b="1" dirty="0">
                 <a:solidFill>
-                  <a:srgbClr val="94A3B8"/>
+                  <a:srgbClr val="0369A1"/>
                 </a:solidFill>
                 <a:latin typeface="Arial" pitchFamily="34" charset="0"/>
                 <a:ea typeface="Arial" pitchFamily="34" charset="-122"/>
@@ -2821,11 +2821,11 @@
             <a:avLst/>
           </a:prstGeom>
           <a:solidFill>
-            <a:srgbClr val="131E32"/>
+            <a:srgbClr val="FFFFFF"/>
           </a:solidFill>
           <a:ln w="25400">
             <a:solidFill>
-              <a:srgbClr val="F43F5E"/>
+              <a:srgbClr val="E11D48"/>
             </a:solidFill>
             <a:prstDash val="solid"/>
           </a:ln>
@@ -2846,11 +2846,11 @@
             <a:avLst/>
           </a:prstGeom>
           <a:solidFill>
-            <a:srgbClr val="0F172A"/>
+            <a:srgbClr val="FFE4E6"/>
           </a:solidFill>
           <a:ln w="12700">
             <a:solidFill>
-              <a:srgbClr val="F43F5E"/>
+              <a:srgbClr val="E11D48"/>
             </a:solidFill>
             <a:prstDash val="solid"/>
           </a:ln>
@@ -2883,7 +2883,7 @@
             <a:r>
               <a:rPr lang="en-US" sz="1250" b="1" dirty="0">
                 <a:solidFill>
-                  <a:srgbClr val="FFFFFF"/>
+                  <a:srgbClr val="0F172A"/>
                 </a:solidFill>
                 <a:latin typeface="Arial" pitchFamily="34" charset="0"/>
                 <a:ea typeface="Arial" pitchFamily="34" charset="-122"/>
@@ -2925,7 +2925,7 @@
             <a:r>
               <a:rPr lang="en-US" sz="1100" dirty="0">
                 <a:solidFill>
-                  <a:srgbClr val="94A3B8"/>
+                  <a:srgbClr val="334155"/>
                 </a:solidFill>
                 <a:latin typeface="Arial" pitchFamily="34" charset="0"/>
                 <a:ea typeface="Arial" pitchFamily="34" charset="-122"/>
@@ -2954,7 +2954,7 @@
             <a:r>
               <a:rPr lang="en-US" sz="1100" dirty="0">
                 <a:solidFill>
-                  <a:srgbClr val="94A3B8"/>
+                  <a:srgbClr val="334155"/>
                 </a:solidFill>
                 <a:latin typeface="Arial" pitchFamily="34" charset="0"/>
                 <a:ea typeface="Arial" pitchFamily="34" charset="-122"/>
@@ -2983,7 +2983,7 @@
             <a:r>
               <a:rPr lang="en-US" sz="1100" dirty="0">
                 <a:solidFill>
-                  <a:srgbClr val="94A3B8"/>
+                  <a:srgbClr val="334155"/>
                 </a:solidFill>
                 <a:latin typeface="Arial" pitchFamily="34" charset="0"/>
                 <a:ea typeface="Arial" pitchFamily="34" charset="-122"/>
@@ -3010,11 +3010,11 @@
             <a:avLst/>
           </a:prstGeom>
           <a:solidFill>
-            <a:srgbClr val="131E32"/>
+            <a:srgbClr val="FFFFFF"/>
           </a:solidFill>
           <a:ln w="25400">
             <a:solidFill>
-              <a:srgbClr val="10B981"/>
+              <a:srgbClr val="059669"/>
             </a:solidFill>
             <a:prstDash val="solid"/>
           </a:ln>
@@ -3035,11 +3035,11 @@
             <a:avLst/>
           </a:prstGeom>
           <a:solidFill>
-            <a:srgbClr val="0F172A"/>
+            <a:srgbClr val="D1FAE5"/>
           </a:solidFill>
           <a:ln w="12700">
             <a:solidFill>
-              <a:srgbClr val="10B981"/>
+              <a:srgbClr val="059669"/>
             </a:solidFill>
             <a:prstDash val="solid"/>
           </a:ln>
@@ -3072,7 +3072,7 @@
             <a:r>
               <a:rPr lang="en-US" sz="1250" b="1" dirty="0">
                 <a:solidFill>
-                  <a:srgbClr val="FFFFFF"/>
+                  <a:srgbClr val="0F172A"/>
                 </a:solidFill>
                 <a:latin typeface="Arial" pitchFamily="34" charset="0"/>
                 <a:ea typeface="Arial" pitchFamily="34" charset="-122"/>
@@ -3114,7 +3114,7 @@
             <a:r>
               <a:rPr lang="en-US" sz="1100" dirty="0">
                 <a:solidFill>
-                  <a:srgbClr val="94A3B8"/>
+                  <a:srgbClr val="334155"/>
                 </a:solidFill>
                 <a:latin typeface="Arial" pitchFamily="34" charset="0"/>
                 <a:ea typeface="Arial" pitchFamily="34" charset="-122"/>
@@ -3143,7 +3143,7 @@
             <a:r>
               <a:rPr lang="en-US" sz="1100" dirty="0">
                 <a:solidFill>
-                  <a:srgbClr val="94A3B8"/>
+                  <a:srgbClr val="334155"/>
                 </a:solidFill>
                 <a:latin typeface="Arial" pitchFamily="34" charset="0"/>
                 <a:ea typeface="Arial" pitchFamily="34" charset="-122"/>
@@ -3172,7 +3172,7 @@
             <a:r>
               <a:rPr lang="en-US" sz="1100" dirty="0">
                 <a:solidFill>
-                  <a:srgbClr val="94A3B8"/>
+                  <a:srgbClr val="334155"/>
                 </a:solidFill>
                 <a:latin typeface="Arial" pitchFamily="34" charset="0"/>
                 <a:ea typeface="Arial" pitchFamily="34" charset="-122"/>
@@ -3198,7 +3198,7 @@
     <p:bg>
       <p:bgPr>
         <a:solidFill>
-          <a:srgbClr val="0A0F1D"/>
+          <a:srgbClr val="F8FAFC"/>
         </a:solidFill>
       </p:bgPr>
     </p:bg>
@@ -3231,11 +3231,11 @@
             <a:avLst/>
           </a:prstGeom>
           <a:solidFill>
-            <a:srgbClr val="2563EB"/>
+            <a:srgbClr val="0284C7"/>
           </a:solidFill>
           <a:ln w="12700">
             <a:solidFill>
-              <a:srgbClr val="2563EB"/>
+              <a:srgbClr val="0284C7"/>
             </a:solidFill>
             <a:prstDash val="solid"/>
           </a:ln>
@@ -3257,8 +3257,8 @@
         </p:blipFill>
         <p:spPr>
           <a:xfrm>
-            <a:off x="640080" y="228600"/>
-            <a:ext cx="1828800" cy="457200"/>
+            <a:off x="640080" y="201168"/>
+            <a:ext cx="1920240" cy="475488"/>
           </a:xfrm>
           <a:prstGeom prst="rect">
             <a:avLst/>
@@ -3273,32 +3273,96 @@
         </p:nvSpPr>
         <p:spPr>
           <a:xfrm>
-            <a:off x="2743200" y="274320"/>
+            <a:off x="2834640" y="256032"/>
+            <a:ext cx="3017520" cy="347472"/>
+          </a:xfrm>
+          <a:prstGeom prst="roundRect">
+            <a:avLst/>
+          </a:prstGeom>
+          <a:solidFill>
+            <a:srgbClr val="E0F2FE"/>
+          </a:solidFill>
+          <a:ln w="15240">
+            <a:solidFill>
+              <a:srgbClr val="BAE6FD"/>
+            </a:solidFill>
+            <a:prstDash val="solid"/>
+          </a:ln>
+        </p:spPr>
+      </p:sp>
+      <p:sp>
+        <p:nvSpPr>
+          <p:cNvPr id="5" name="Text 2"/>
+          <p:cNvSpPr/>
+          <p:nvPr/>
+        </p:nvSpPr>
+        <p:spPr>
+          <a:xfrm>
+            <a:off x="2834640" y="256032"/>
+            <a:ext cx="3017520" cy="347472"/>
+          </a:xfrm>
+          <a:prstGeom prst="rect">
+            <a:avLst/>
+          </a:prstGeom>
+          <a:noFill/>
+          <a:ln/>
+        </p:spPr>
+        <p:txBody>
+          <a:bodyPr wrap="square" rtlCol="0" anchor="ctr"/>
+          <a:lstStyle/>
+          <a:p>
+            <a:pPr algn="ctr" indent="0" marL="0">
+              <a:buNone/>
+            </a:pPr>
+            <a:r>
+              <a:rPr lang="en-US" sz="950" b="1" dirty="0">
+                <a:solidFill>
+                  <a:srgbClr val="0369A1"/>
+                </a:solidFill>
+                <a:latin typeface="Arial" pitchFamily="34" charset="0"/>
+                <a:ea typeface="Arial" pitchFamily="34" charset="-122"/>
+                <a:cs typeface="Arial" pitchFamily="34" charset="-120"/>
+              </a:rPr>
+              <a:t>ALUR KEMITRAAN</a:t>
+            </a:r>
+            <a:endParaRPr lang="en-US" sz="950" dirty="0"/>
+          </a:p>
+        </p:txBody>
+      </p:sp>
+      <p:sp>
+        <p:nvSpPr>
+          <p:cNvPr id="6" name="Shape 3"/>
+          <p:cNvSpPr/>
+          <p:nvPr/>
+        </p:nvSpPr>
+        <p:spPr>
+          <a:xfrm>
+            <a:off x="8595360" y="256032"/>
             <a:ext cx="2926080" cy="347472"/>
           </a:xfrm>
           <a:prstGeom prst="roundRect">
             <a:avLst/>
           </a:prstGeom>
           <a:solidFill>
-            <a:srgbClr val="0F172A"/>
+            <a:srgbClr val="FEF3C7"/>
           </a:solidFill>
           <a:ln w="15240">
             <a:solidFill>
-              <a:srgbClr val="2563EB"/>
-            </a:solidFill>
-            <a:prstDash val="solid"/>
-          </a:ln>
-        </p:spPr>
-      </p:sp>
-      <p:sp>
-        <p:nvSpPr>
-          <p:cNvPr id="5" name="Text 2"/>
-          <p:cNvSpPr/>
-          <p:nvPr/>
-        </p:nvSpPr>
-        <p:spPr>
-          <a:xfrm>
-            <a:off x="2743200" y="274320"/>
+              <a:srgbClr val="FCD34D"/>
+            </a:solidFill>
+            <a:prstDash val="solid"/>
+          </a:ln>
+        </p:spPr>
+      </p:sp>
+      <p:sp>
+        <p:nvSpPr>
+          <p:cNvPr id="7" name="Text 4"/>
+          <p:cNvSpPr/>
+          <p:nvPr/>
+        </p:nvSpPr>
+        <p:spPr>
+          <a:xfrm>
+            <a:off x="8595360" y="256032"/>
             <a:ext cx="2926080" cy="347472"/>
           </a:xfrm>
           <a:prstGeom prst="rect">
@@ -3315,73 +3379,9 @@
               <a:buNone/>
             </a:pPr>
             <a:r>
-              <a:rPr lang="en-US" sz="900" b="1" dirty="0">
-                <a:solidFill>
-                  <a:srgbClr val="38BDF8"/>
-                </a:solidFill>
-                <a:latin typeface="Arial" pitchFamily="34" charset="0"/>
-                <a:ea typeface="Arial" pitchFamily="34" charset="-122"/>
-                <a:cs typeface="Arial" pitchFamily="34" charset="-120"/>
-              </a:rPr>
-              <a:t>ALUR KEMITRAAN</a:t>
-            </a:r>
-            <a:endParaRPr lang="en-US" sz="900" dirty="0"/>
-          </a:p>
-        </p:txBody>
-      </p:sp>
-      <p:sp>
-        <p:nvSpPr>
-          <p:cNvPr id="6" name="Shape 3"/>
-          <p:cNvSpPr/>
-          <p:nvPr/>
-        </p:nvSpPr>
-        <p:spPr>
-          <a:xfrm>
-            <a:off x="8778240" y="274320"/>
-            <a:ext cx="2743200" cy="347472"/>
-          </a:xfrm>
-          <a:prstGeom prst="roundRect">
-            <a:avLst/>
-          </a:prstGeom>
-          <a:solidFill>
-            <a:srgbClr val="1C1917"/>
-          </a:solidFill>
-          <a:ln w="15240">
-            <a:solidFill>
-              <a:srgbClr val="F59E0B"/>
-            </a:solidFill>
-            <a:prstDash val="solid"/>
-          </a:ln>
-        </p:spPr>
-      </p:sp>
-      <p:sp>
-        <p:nvSpPr>
-          <p:cNvPr id="7" name="Text 4"/>
-          <p:cNvSpPr/>
-          <p:nvPr/>
-        </p:nvSpPr>
-        <p:spPr>
-          <a:xfrm>
-            <a:off x="8778240" y="274320"/>
-            <a:ext cx="2743200" cy="347472"/>
-          </a:xfrm>
-          <a:prstGeom prst="rect">
-            <a:avLst/>
-          </a:prstGeom>
-          <a:noFill/>
-          <a:ln/>
-        </p:spPr>
-        <p:txBody>
-          <a:bodyPr wrap="square" rtlCol="0" anchor="ctr"/>
-          <a:lstStyle/>
-          <a:p>
-            <a:pPr algn="ctr" indent="0" marL="0">
-              <a:buNone/>
-            </a:pPr>
-            <a:r>
-              <a:rPr lang="en-US" sz="900" b="1" dirty="0">
-                <a:solidFill>
-                  <a:srgbClr val="F59E0B"/>
+              <a:rPr lang="en-US" sz="950" b="1" dirty="0">
+                <a:solidFill>
+                  <a:srgbClr val="D97706"/>
                 </a:solidFill>
                 <a:latin typeface="Arial" pitchFamily="34" charset="0"/>
                 <a:ea typeface="Arial" pitchFamily="34" charset="-122"/>
@@ -3389,7 +3389,7 @@
               </a:rPr>
               <a:t>👑 Sesi Khusus Kepala Sekolah</a:t>
             </a:r>
-            <a:endParaRPr lang="en-US" sz="900" dirty="0"/>
+            <a:endParaRPr lang="en-US" sz="950" dirty="0"/>
           </a:p>
         </p:txBody>
       </p:sp>
@@ -3420,7 +3420,7 @@
             <a:r>
               <a:rPr lang="en-US" sz="2200" b="1" dirty="0">
                 <a:solidFill>
-                  <a:srgbClr val="FFFFFF"/>
+                  <a:srgbClr val="0F172A"/>
                 </a:solidFill>
                 <a:latin typeface="Arial" pitchFamily="34" charset="0"/>
                 <a:ea typeface="Arial" pitchFamily="34" charset="-122"/>
@@ -3449,7 +3449,7 @@
           <a:noFill/>
           <a:ln w="15240">
             <a:solidFill>
-              <a:srgbClr val="1E293B"/>
+              <a:srgbClr val="E2E8F0"/>
             </a:solidFill>
             <a:prstDash val="solid"/>
           </a:ln>
@@ -3521,7 +3521,7 @@
             <a:r>
               <a:rPr lang="en-US" sz="900" b="1" dirty="0">
                 <a:solidFill>
-                  <a:srgbClr val="94A3B8"/>
+                  <a:srgbClr val="0369A1"/>
                 </a:solidFill>
                 <a:latin typeface="Arial" pitchFamily="34" charset="0"/>
                 <a:ea typeface="Arial" pitchFamily="34" charset="-122"/>
@@ -3548,11 +3548,11 @@
             <a:avLst/>
           </a:prstGeom>
           <a:solidFill>
-            <a:srgbClr val="131E32"/>
+            <a:srgbClr val="FFFFFF"/>
           </a:solidFill>
           <a:ln w="19050">
             <a:solidFill>
-              <a:srgbClr val="2563EB"/>
+              <a:srgbClr val="0284C7"/>
             </a:solidFill>
             <a:prstDash val="solid"/>
           </a:ln>
@@ -3573,11 +3573,11 @@
             <a:avLst/>
           </a:prstGeom>
           <a:solidFill>
-            <a:srgbClr val="2563EB"/>
+            <a:srgbClr val="0284C7"/>
           </a:solidFill>
           <a:ln w="12700">
             <a:solidFill>
-              <a:srgbClr val="2563EB"/>
+              <a:srgbClr val="0284C7"/>
             </a:solidFill>
             <a:prstDash val="solid"/>
           </a:ln>
@@ -3649,7 +3649,7 @@
             <a:r>
               <a:rPr lang="en-US" sz="1300" b="1" dirty="0">
                 <a:solidFill>
-                  <a:srgbClr val="FFFFFF"/>
+                  <a:srgbClr val="0F172A"/>
                 </a:solidFill>
                 <a:latin typeface="Arial" pitchFamily="34" charset="0"/>
                 <a:ea typeface="Arial" pitchFamily="34" charset="-122"/>
@@ -3691,7 +3691,7 @@
             <a:r>
               <a:rPr lang="en-US" sz="1050" dirty="0">
                 <a:solidFill>
-                  <a:srgbClr val="94A3B8"/>
+                  <a:srgbClr val="334155"/>
                 </a:solidFill>
                 <a:latin typeface="Arial" pitchFamily="34" charset="0"/>
                 <a:ea typeface="Arial" pitchFamily="34" charset="-122"/>
@@ -3718,11 +3718,11 @@
             <a:avLst/>
           </a:prstGeom>
           <a:solidFill>
-            <a:srgbClr val="131E32"/>
+            <a:srgbClr val="FFFFFF"/>
           </a:solidFill>
           <a:ln w="19050">
             <a:solidFill>
-              <a:srgbClr val="2563EB"/>
+              <a:srgbClr val="0284C7"/>
             </a:solidFill>
             <a:prstDash val="solid"/>
           </a:ln>
@@ -3743,11 +3743,11 @@
             <a:avLst/>
           </a:prstGeom>
           <a:solidFill>
-            <a:srgbClr val="2563EB"/>
+            <a:srgbClr val="0284C7"/>
           </a:solidFill>
           <a:ln w="12700">
             <a:solidFill>
-              <a:srgbClr val="2563EB"/>
+              <a:srgbClr val="0284C7"/>
             </a:solidFill>
             <a:prstDash val="solid"/>
           </a:ln>
@@ -3819,7 +3819,7 @@
             <a:r>
               <a:rPr lang="en-US" sz="1300" b="1" dirty="0">
                 <a:solidFill>
-                  <a:srgbClr val="FFFFFF"/>
+                  <a:srgbClr val="0F172A"/>
                 </a:solidFill>
                 <a:latin typeface="Arial" pitchFamily="34" charset="0"/>
                 <a:ea typeface="Arial" pitchFamily="34" charset="-122"/>
@@ -3861,7 +3861,7 @@
             <a:r>
               <a:rPr lang="en-US" sz="1050" dirty="0">
                 <a:solidFill>
-                  <a:srgbClr val="94A3B8"/>
+                  <a:srgbClr val="334155"/>
                 </a:solidFill>
                 <a:latin typeface="Arial" pitchFamily="34" charset="0"/>
                 <a:ea typeface="Arial" pitchFamily="34" charset="-122"/>
@@ -3888,11 +3888,11 @@
             <a:avLst/>
           </a:prstGeom>
           <a:solidFill>
-            <a:srgbClr val="131E32"/>
+            <a:srgbClr val="FFFFFF"/>
           </a:solidFill>
           <a:ln w="19050">
             <a:solidFill>
-              <a:srgbClr val="2563EB"/>
+              <a:srgbClr val="0284C7"/>
             </a:solidFill>
             <a:prstDash val="solid"/>
           </a:ln>
@@ -3913,11 +3913,11 @@
             <a:avLst/>
           </a:prstGeom>
           <a:solidFill>
-            <a:srgbClr val="2563EB"/>
+            <a:srgbClr val="0284C7"/>
           </a:solidFill>
           <a:ln w="12700">
             <a:solidFill>
-              <a:srgbClr val="2563EB"/>
+              <a:srgbClr val="0284C7"/>
             </a:solidFill>
             <a:prstDash val="solid"/>
           </a:ln>
@@ -3989,7 +3989,7 @@
             <a:r>
               <a:rPr lang="en-US" sz="1300" b="1" dirty="0">
                 <a:solidFill>
-                  <a:srgbClr val="FFFFFF"/>
+                  <a:srgbClr val="0F172A"/>
                 </a:solidFill>
                 <a:latin typeface="Arial" pitchFamily="34" charset="0"/>
                 <a:ea typeface="Arial" pitchFamily="34" charset="-122"/>
@@ -4031,7 +4031,7 @@
             <a:r>
               <a:rPr lang="en-US" sz="1050" dirty="0">
                 <a:solidFill>
-                  <a:srgbClr val="94A3B8"/>
+                  <a:srgbClr val="334155"/>
                 </a:solidFill>
                 <a:latin typeface="Arial" pitchFamily="34" charset="0"/>
                 <a:ea typeface="Arial" pitchFamily="34" charset="-122"/>
@@ -4058,11 +4058,11 @@
             <a:avLst/>
           </a:prstGeom>
           <a:solidFill>
-            <a:srgbClr val="131E32"/>
+            <a:srgbClr val="FFFFFF"/>
           </a:solidFill>
           <a:ln w="19050">
             <a:solidFill>
-              <a:srgbClr val="2563EB"/>
+              <a:srgbClr val="0284C7"/>
             </a:solidFill>
             <a:prstDash val="solid"/>
           </a:ln>
@@ -4083,11 +4083,11 @@
             <a:avLst/>
           </a:prstGeom>
           <a:solidFill>
-            <a:srgbClr val="2563EB"/>
+            <a:srgbClr val="0284C7"/>
           </a:solidFill>
           <a:ln w="12700">
             <a:solidFill>
-              <a:srgbClr val="2563EB"/>
+              <a:srgbClr val="0284C7"/>
             </a:solidFill>
             <a:prstDash val="solid"/>
           </a:ln>
@@ -4159,7 +4159,7 @@
             <a:r>
               <a:rPr lang="en-US" sz="1300" b="1" dirty="0">
                 <a:solidFill>
-                  <a:srgbClr val="FFFFFF"/>
+                  <a:srgbClr val="0F172A"/>
                 </a:solidFill>
                 <a:latin typeface="Arial" pitchFamily="34" charset="0"/>
                 <a:ea typeface="Arial" pitchFamily="34" charset="-122"/>
@@ -4201,7 +4201,7 @@
             <a:r>
               <a:rPr lang="en-US" sz="1050" dirty="0">
                 <a:solidFill>
-                  <a:srgbClr val="94A3B8"/>
+                  <a:srgbClr val="334155"/>
                 </a:solidFill>
                 <a:latin typeface="Arial" pitchFamily="34" charset="0"/>
                 <a:ea typeface="Arial" pitchFamily="34" charset="-122"/>
@@ -4227,7 +4227,7 @@
     <p:bg>
       <p:bgPr>
         <a:solidFill>
-          <a:srgbClr val="0A0F1D"/>
+          <a:srgbClr val="F8FAFC"/>
         </a:solidFill>
       </p:bgPr>
     </p:bg>
@@ -4260,11 +4260,11 @@
             <a:avLst/>
           </a:prstGeom>
           <a:solidFill>
-            <a:srgbClr val="2563EB"/>
+            <a:srgbClr val="0284C7"/>
           </a:solidFill>
           <a:ln w="12700">
             <a:solidFill>
-              <a:srgbClr val="2563EB"/>
+              <a:srgbClr val="0284C7"/>
             </a:solidFill>
             <a:prstDash val="solid"/>
           </a:ln>
@@ -4287,7 +4287,7 @@
         <p:spPr>
           <a:xfrm>
             <a:off x="731520" y="594360"/>
-            <a:ext cx="2560320" cy="640080"/>
+            <a:ext cx="2743200" cy="685800"/>
           </a:xfrm>
           <a:prstGeom prst="rect">
             <a:avLst/>
@@ -4303,17 +4303,17 @@
         <p:spPr>
           <a:xfrm>
             <a:off x="731520" y="1417320"/>
-            <a:ext cx="4206240" cy="329184"/>
+            <a:ext cx="4389120" cy="347472"/>
           </a:xfrm>
           <a:prstGeom prst="roundRect">
             <a:avLst/>
           </a:prstGeom>
           <a:solidFill>
-            <a:srgbClr val="0F172A"/>
+            <a:srgbClr val="E0F2FE"/>
           </a:solidFill>
           <a:ln w="15240">
             <a:solidFill>
-              <a:srgbClr val="2563EB"/>
+              <a:srgbClr val="BAE6FD"/>
             </a:solidFill>
             <a:prstDash val="solid"/>
           </a:ln>
@@ -4328,7 +4328,7 @@
         <p:spPr>
           <a:xfrm>
             <a:off x="731520" y="1417320"/>
-            <a:ext cx="4206240" cy="329184"/>
+            <a:ext cx="4389120" cy="347472"/>
           </a:xfrm>
           <a:prstGeom prst="rect">
             <a:avLst/>
@@ -4344,9 +4344,9 @@
               <a:buNone/>
             </a:pPr>
             <a:r>
-              <a:rPr lang="en-US" sz="900" b="1" dirty="0">
-                <a:solidFill>
-                  <a:srgbClr val="38BDF8"/>
+              <a:rPr lang="en-US" sz="950" b="1" dirty="0">
+                <a:solidFill>
+                  <a:srgbClr val="0369A1"/>
                 </a:solidFill>
                 <a:latin typeface="Arial" pitchFamily="34" charset="0"/>
                 <a:ea typeface="Arial" pitchFamily="34" charset="-122"/>
@@ -4354,7 +4354,7 @@
               </a:rPr>
               <a:t>🤝 KESIMPULAN &amp; KOMITMEN KEMITRAAN</a:t>
             </a:r>
-            <a:endParaRPr lang="en-US" sz="900" dirty="0"/>
+            <a:endParaRPr lang="en-US" sz="950" dirty="0"/>
           </a:p>
         </p:txBody>
       </p:sp>
@@ -4388,7 +4388,7 @@
             <a:r>
               <a:rPr lang="en-US" sz="2600" b="1" dirty="0">
                 <a:solidFill>
-                  <a:srgbClr val="FFFFFF"/>
+                  <a:srgbClr val="0F172A"/>
                 </a:solidFill>
                 <a:latin typeface="Arial" pitchFamily="34" charset="0"/>
                 <a:ea typeface="Arial" pitchFamily="34" charset="-122"/>
@@ -4408,7 +4408,7 @@
             <a:r>
               <a:rPr lang="en-US" sz="2600" b="1" dirty="0">
                 <a:solidFill>
-                  <a:srgbClr val="FFFFFF"/>
+                  <a:srgbClr val="0F172A"/>
                 </a:solidFill>
                 <a:latin typeface="Arial" pitchFamily="34" charset="0"/>
                 <a:ea typeface="Arial" pitchFamily="34" charset="-122"/>
@@ -4435,11 +4435,11 @@
             <a:avLst/>
           </a:prstGeom>
           <a:solidFill>
-            <a:srgbClr val="131E32"/>
+            <a:srgbClr val="FFFFFF"/>
           </a:solidFill>
           <a:ln w="19050">
             <a:solidFill>
-              <a:srgbClr val="2563EB"/>
+              <a:srgbClr val="0284C7"/>
             </a:solidFill>
             <a:prstDash val="solid"/>
           </a:ln>
@@ -4475,7 +4475,7 @@
             <a:r>
               <a:rPr lang="en-US" sz="1150" b="1" dirty="0">
                 <a:solidFill>
-                  <a:srgbClr val="10B981"/>
+                  <a:srgbClr val="059669"/>
                 </a:solidFill>
                 <a:latin typeface="Arial" pitchFamily="34" charset="0"/>
                 <a:ea typeface="Arial" pitchFamily="34" charset="-122"/>
@@ -4492,7 +4492,7 @@
             <a:r>
               <a:rPr lang="en-US" sz="1100" dirty="0">
                 <a:solidFill>
-                  <a:srgbClr val="FFFFFF"/>
+                  <a:srgbClr val="0F172A"/>
                 </a:solidFill>
                 <a:latin typeface="Arial" pitchFamily="34" charset="0"/>
                 <a:ea typeface="Arial" pitchFamily="34" charset="-122"/>
@@ -4510,7 +4510,7 @@
             <a:r>
               <a:rPr lang="en-US" sz="1150" b="1" dirty="0">
                 <a:solidFill>
-                  <a:srgbClr val="10B981"/>
+                  <a:srgbClr val="059669"/>
                 </a:solidFill>
                 <a:latin typeface="Arial" pitchFamily="34" charset="0"/>
                 <a:ea typeface="Arial" pitchFamily="34" charset="-122"/>
@@ -4527,7 +4527,7 @@
             <a:r>
               <a:rPr lang="en-US" sz="1100" dirty="0">
                 <a:solidFill>
-                  <a:srgbClr val="FFFFFF"/>
+                  <a:srgbClr val="0F172A"/>
                 </a:solidFill>
                 <a:latin typeface="Arial" pitchFamily="34" charset="0"/>
                 <a:ea typeface="Arial" pitchFamily="34" charset="-122"/>
@@ -4545,7 +4545,7 @@
             <a:r>
               <a:rPr lang="en-US" sz="1150" b="1" dirty="0">
                 <a:solidFill>
-                  <a:srgbClr val="10B981"/>
+                  <a:srgbClr val="059669"/>
                 </a:solidFill>
                 <a:latin typeface="Arial" pitchFamily="34" charset="0"/>
                 <a:ea typeface="Arial" pitchFamily="34" charset="-122"/>
@@ -4562,7 +4562,7 @@
             <a:r>
               <a:rPr lang="en-US" sz="1100" dirty="0">
                 <a:solidFill>
-                  <a:srgbClr val="FFFFFF"/>
+                  <a:srgbClr val="0F172A"/>
                 </a:solidFill>
                 <a:latin typeface="Arial" pitchFamily="34" charset="0"/>
                 <a:ea typeface="Arial" pitchFamily="34" charset="-122"/>
@@ -4580,7 +4580,7 @@
             <a:r>
               <a:rPr lang="en-US" sz="1150" b="1" dirty="0">
                 <a:solidFill>
-                  <a:srgbClr val="10B981"/>
+                  <a:srgbClr val="059669"/>
                 </a:solidFill>
                 <a:latin typeface="Arial" pitchFamily="34" charset="0"/>
                 <a:ea typeface="Arial" pitchFamily="34" charset="-122"/>
@@ -4597,7 +4597,7 @@
             <a:r>
               <a:rPr lang="en-US" sz="1100" dirty="0">
                 <a:solidFill>
-                  <a:srgbClr val="FFFFFF"/>
+                  <a:srgbClr val="0F172A"/>
                 </a:solidFill>
                 <a:latin typeface="Arial" pitchFamily="34" charset="0"/>
                 <a:ea typeface="Arial" pitchFamily="34" charset="-122"/>
@@ -4636,7 +4636,7 @@
             <a:r>
               <a:rPr lang="en-US" sz="1100" b="1" dirty="0">
                 <a:solidFill>
-                  <a:srgbClr val="38BDF8"/>
+                  <a:srgbClr val="0369A1"/>
                 </a:solidFill>
                 <a:latin typeface="Arial" pitchFamily="34" charset="0"/>
                 <a:ea typeface="Arial" pitchFamily="34" charset="-122"/>
@@ -4662,7 +4662,7 @@
     <p:bg>
       <p:bgPr>
         <a:solidFill>
-          <a:srgbClr val="0A0F1D"/>
+          <a:srgbClr val="F8FAFC"/>
         </a:solidFill>
       </p:bgPr>
     </p:bg>
@@ -4695,11 +4695,11 @@
             <a:avLst/>
           </a:prstGeom>
           <a:solidFill>
-            <a:srgbClr val="2563EB"/>
+            <a:srgbClr val="0284C7"/>
           </a:solidFill>
           <a:ln w="12700">
             <a:solidFill>
-              <a:srgbClr val="2563EB"/>
+              <a:srgbClr val="0284C7"/>
             </a:solidFill>
             <a:prstDash val="solid"/>
           </a:ln>
@@ -4721,8 +4721,8 @@
         </p:blipFill>
         <p:spPr>
           <a:xfrm>
-            <a:off x="640080" y="228600"/>
-            <a:ext cx="1828800" cy="457200"/>
+            <a:off x="640080" y="201168"/>
+            <a:ext cx="1920240" cy="475488"/>
           </a:xfrm>
           <a:prstGeom prst="rect">
             <a:avLst/>
@@ -4737,32 +4737,96 @@
         </p:nvSpPr>
         <p:spPr>
           <a:xfrm>
-            <a:off x="2743200" y="274320"/>
+            <a:off x="2834640" y="256032"/>
+            <a:ext cx="3017520" cy="347472"/>
+          </a:xfrm>
+          <a:prstGeom prst="roundRect">
+            <a:avLst/>
+          </a:prstGeom>
+          <a:solidFill>
+            <a:srgbClr val="E0F2FE"/>
+          </a:solidFill>
+          <a:ln w="15240">
+            <a:solidFill>
+              <a:srgbClr val="BAE6FD"/>
+            </a:solidFill>
+            <a:prstDash val="solid"/>
+          </a:ln>
+        </p:spPr>
+      </p:sp>
+      <p:sp>
+        <p:nvSpPr>
+          <p:cNvPr id="5" name="Text 2"/>
+          <p:cNvSpPr/>
+          <p:nvPr/>
+        </p:nvSpPr>
+        <p:spPr>
+          <a:xfrm>
+            <a:off x="2834640" y="256032"/>
+            <a:ext cx="3017520" cy="347472"/>
+          </a:xfrm>
+          <a:prstGeom prst="rect">
+            <a:avLst/>
+          </a:prstGeom>
+          <a:noFill/>
+          <a:ln/>
+        </p:spPr>
+        <p:txBody>
+          <a:bodyPr wrap="square" rtlCol="0" anchor="ctr"/>
+          <a:lstStyle/>
+          <a:p>
+            <a:pPr algn="ctr" indent="0" marL="0">
+              <a:buNone/>
+            </a:pPr>
+            <a:r>
+              <a:rPr lang="en-US" sz="950" b="1" dirty="0">
+                <a:solidFill>
+                  <a:srgbClr val="0369A1"/>
+                </a:solidFill>
+                <a:latin typeface="Arial" pitchFamily="34" charset="0"/>
+                <a:ea typeface="Arial" pitchFamily="34" charset="-122"/>
+                <a:cs typeface="Arial" pitchFamily="34" charset="-120"/>
+              </a:rPr>
+              <a:t>IDENTIFIKASI MASALAH</a:t>
+            </a:r>
+            <a:endParaRPr lang="en-US" sz="950" dirty="0"/>
+          </a:p>
+        </p:txBody>
+      </p:sp>
+      <p:sp>
+        <p:nvSpPr>
+          <p:cNvPr id="6" name="Shape 3"/>
+          <p:cNvSpPr/>
+          <p:nvPr/>
+        </p:nvSpPr>
+        <p:spPr>
+          <a:xfrm>
+            <a:off x="8595360" y="256032"/>
             <a:ext cx="2926080" cy="347472"/>
           </a:xfrm>
           <a:prstGeom prst="roundRect">
             <a:avLst/>
           </a:prstGeom>
           <a:solidFill>
-            <a:srgbClr val="0F172A"/>
+            <a:srgbClr val="FEF3C7"/>
           </a:solidFill>
           <a:ln w="15240">
             <a:solidFill>
-              <a:srgbClr val="2563EB"/>
-            </a:solidFill>
-            <a:prstDash val="solid"/>
-          </a:ln>
-        </p:spPr>
-      </p:sp>
-      <p:sp>
-        <p:nvSpPr>
-          <p:cNvPr id="5" name="Text 2"/>
-          <p:cNvSpPr/>
-          <p:nvPr/>
-        </p:nvSpPr>
-        <p:spPr>
-          <a:xfrm>
-            <a:off x="2743200" y="274320"/>
+              <a:srgbClr val="FCD34D"/>
+            </a:solidFill>
+            <a:prstDash val="solid"/>
+          </a:ln>
+        </p:spPr>
+      </p:sp>
+      <p:sp>
+        <p:nvSpPr>
+          <p:cNvPr id="7" name="Text 4"/>
+          <p:cNvSpPr/>
+          <p:nvPr/>
+        </p:nvSpPr>
+        <p:spPr>
+          <a:xfrm>
+            <a:off x="8595360" y="256032"/>
             <a:ext cx="2926080" cy="347472"/>
           </a:xfrm>
           <a:prstGeom prst="rect">
@@ -4779,73 +4843,9 @@
               <a:buNone/>
             </a:pPr>
             <a:r>
-              <a:rPr lang="en-US" sz="900" b="1" dirty="0">
-                <a:solidFill>
-                  <a:srgbClr val="38BDF8"/>
-                </a:solidFill>
-                <a:latin typeface="Arial" pitchFamily="34" charset="0"/>
-                <a:ea typeface="Arial" pitchFamily="34" charset="-122"/>
-                <a:cs typeface="Arial" pitchFamily="34" charset="-120"/>
-              </a:rPr>
-              <a:t>IDENTIFIKASI MASALAH</a:t>
-            </a:r>
-            <a:endParaRPr lang="en-US" sz="900" dirty="0"/>
-          </a:p>
-        </p:txBody>
-      </p:sp>
-      <p:sp>
-        <p:nvSpPr>
-          <p:cNvPr id="6" name="Shape 3"/>
-          <p:cNvSpPr/>
-          <p:nvPr/>
-        </p:nvSpPr>
-        <p:spPr>
-          <a:xfrm>
-            <a:off x="8778240" y="274320"/>
-            <a:ext cx="2743200" cy="347472"/>
-          </a:xfrm>
-          <a:prstGeom prst="roundRect">
-            <a:avLst/>
-          </a:prstGeom>
-          <a:solidFill>
-            <a:srgbClr val="1C1917"/>
-          </a:solidFill>
-          <a:ln w="15240">
-            <a:solidFill>
-              <a:srgbClr val="F59E0B"/>
-            </a:solidFill>
-            <a:prstDash val="solid"/>
-          </a:ln>
-        </p:spPr>
-      </p:sp>
-      <p:sp>
-        <p:nvSpPr>
-          <p:cNvPr id="7" name="Text 4"/>
-          <p:cNvSpPr/>
-          <p:nvPr/>
-        </p:nvSpPr>
-        <p:spPr>
-          <a:xfrm>
-            <a:off x="8778240" y="274320"/>
-            <a:ext cx="2743200" cy="347472"/>
-          </a:xfrm>
-          <a:prstGeom prst="rect">
-            <a:avLst/>
-          </a:prstGeom>
-          <a:noFill/>
-          <a:ln/>
-        </p:spPr>
-        <p:txBody>
-          <a:bodyPr wrap="square" rtlCol="0" anchor="ctr"/>
-          <a:lstStyle/>
-          <a:p>
-            <a:pPr algn="ctr" indent="0" marL="0">
-              <a:buNone/>
-            </a:pPr>
-            <a:r>
-              <a:rPr lang="en-US" sz="900" b="1" dirty="0">
-                <a:solidFill>
-                  <a:srgbClr val="F59E0B"/>
+              <a:rPr lang="en-US" sz="950" b="1" dirty="0">
+                <a:solidFill>
+                  <a:srgbClr val="D97706"/>
                 </a:solidFill>
                 <a:latin typeface="Arial" pitchFamily="34" charset="0"/>
                 <a:ea typeface="Arial" pitchFamily="34" charset="-122"/>
@@ -4853,7 +4853,7 @@
               </a:rPr>
               <a:t>👑 Sesi Khusus Kepala Sekolah</a:t>
             </a:r>
-            <a:endParaRPr lang="en-US" sz="900" dirty="0"/>
+            <a:endParaRPr lang="en-US" sz="950" dirty="0"/>
           </a:p>
         </p:txBody>
       </p:sp>
@@ -4884,7 +4884,7 @@
             <a:r>
               <a:rPr lang="en-US" sz="2200" b="1" dirty="0">
                 <a:solidFill>
-                  <a:srgbClr val="FFFFFF"/>
+                  <a:srgbClr val="0F172A"/>
                 </a:solidFill>
                 <a:latin typeface="Arial" pitchFamily="34" charset="0"/>
                 <a:ea typeface="Arial" pitchFamily="34" charset="-122"/>
@@ -4913,7 +4913,7 @@
           <a:noFill/>
           <a:ln w="15240">
             <a:solidFill>
-              <a:srgbClr val="1E293B"/>
+              <a:srgbClr val="E2E8F0"/>
             </a:solidFill>
             <a:prstDash val="solid"/>
           </a:ln>
@@ -4985,7 +4985,7 @@
             <a:r>
               <a:rPr lang="en-US" sz="900" b="1" dirty="0">
                 <a:solidFill>
-                  <a:srgbClr val="94A3B8"/>
+                  <a:srgbClr val="0369A1"/>
                 </a:solidFill>
                 <a:latin typeface="Arial" pitchFamily="34" charset="0"/>
                 <a:ea typeface="Arial" pitchFamily="34" charset="-122"/>
@@ -5012,11 +5012,11 @@
             <a:avLst/>
           </a:prstGeom>
           <a:solidFill>
-            <a:srgbClr val="131E32"/>
+            <a:srgbClr val="FFFFFF"/>
           </a:solidFill>
           <a:ln w="15240">
             <a:solidFill>
-              <a:srgbClr val="1E293B"/>
+              <a:srgbClr val="CBD5E1"/>
             </a:solidFill>
             <a:prstDash val="solid"/>
           </a:ln>
@@ -5037,11 +5037,11 @@
             <a:avLst/>
           </a:prstGeom>
           <a:solidFill>
-            <a:srgbClr val="F43F5E"/>
+            <a:srgbClr val="E11D48"/>
           </a:solidFill>
           <a:ln w="12700">
             <a:solidFill>
-              <a:srgbClr val="F43F5E"/>
+              <a:srgbClr val="E11D48"/>
             </a:solidFill>
             <a:prstDash val="solid"/>
           </a:ln>
@@ -5074,7 +5074,7 @@
             <a:r>
               <a:rPr lang="en-US" sz="1400" b="1" dirty="0">
                 <a:solidFill>
-                  <a:srgbClr val="FFFFFF"/>
+                  <a:srgbClr val="0F172A"/>
                 </a:solidFill>
                 <a:latin typeface="Arial" pitchFamily="34" charset="0"/>
                 <a:ea typeface="Arial" pitchFamily="34" charset="-122"/>
@@ -5116,7 +5116,7 @@
             <a:r>
               <a:rPr lang="en-US" sz="1050" dirty="0">
                 <a:solidFill>
-                  <a:srgbClr val="94A3B8"/>
+                  <a:srgbClr val="334155"/>
                 </a:solidFill>
                 <a:latin typeface="Arial" pitchFamily="34" charset="0"/>
                 <a:ea typeface="Arial" pitchFamily="34" charset="-122"/>
@@ -5143,11 +5143,11 @@
             <a:avLst/>
           </a:prstGeom>
           <a:solidFill>
-            <a:srgbClr val="131E32"/>
+            <a:srgbClr val="FFFFFF"/>
           </a:solidFill>
           <a:ln w="15240">
             <a:solidFill>
-              <a:srgbClr val="1E293B"/>
+              <a:srgbClr val="CBD5E1"/>
             </a:solidFill>
             <a:prstDash val="solid"/>
           </a:ln>
@@ -5168,11 +5168,11 @@
             <a:avLst/>
           </a:prstGeom>
           <a:solidFill>
-            <a:srgbClr val="F59E0B"/>
+            <a:srgbClr val="D97706"/>
           </a:solidFill>
           <a:ln w="12700">
             <a:solidFill>
-              <a:srgbClr val="F59E0B"/>
+              <a:srgbClr val="D97706"/>
             </a:solidFill>
             <a:prstDash val="solid"/>
           </a:ln>
@@ -5205,7 +5205,7 @@
             <a:r>
               <a:rPr lang="en-US" sz="1400" b="1" dirty="0">
                 <a:solidFill>
-                  <a:srgbClr val="FFFFFF"/>
+                  <a:srgbClr val="0F172A"/>
                 </a:solidFill>
                 <a:latin typeface="Arial" pitchFamily="34" charset="0"/>
                 <a:ea typeface="Arial" pitchFamily="34" charset="-122"/>
@@ -5247,7 +5247,7 @@
             <a:r>
               <a:rPr lang="en-US" sz="1050" dirty="0">
                 <a:solidFill>
-                  <a:srgbClr val="94A3B8"/>
+                  <a:srgbClr val="334155"/>
                 </a:solidFill>
                 <a:latin typeface="Arial" pitchFamily="34" charset="0"/>
                 <a:ea typeface="Arial" pitchFamily="34" charset="-122"/>
@@ -5274,11 +5274,11 @@
             <a:avLst/>
           </a:prstGeom>
           <a:solidFill>
-            <a:srgbClr val="131E32"/>
+            <a:srgbClr val="FFFFFF"/>
           </a:solidFill>
           <a:ln w="15240">
             <a:solidFill>
-              <a:srgbClr val="1E293B"/>
+              <a:srgbClr val="CBD5E1"/>
             </a:solidFill>
             <a:prstDash val="solid"/>
           </a:ln>
@@ -5299,11 +5299,11 @@
             <a:avLst/>
           </a:prstGeom>
           <a:solidFill>
-            <a:srgbClr val="8B5CF6"/>
+            <a:srgbClr val="7C3AED"/>
           </a:solidFill>
           <a:ln w="12700">
             <a:solidFill>
-              <a:srgbClr val="8B5CF6"/>
+              <a:srgbClr val="7C3AED"/>
             </a:solidFill>
             <a:prstDash val="solid"/>
           </a:ln>
@@ -5336,7 +5336,7 @@
             <a:r>
               <a:rPr lang="en-US" sz="1400" b="1" dirty="0">
                 <a:solidFill>
-                  <a:srgbClr val="FFFFFF"/>
+                  <a:srgbClr val="0F172A"/>
                 </a:solidFill>
                 <a:latin typeface="Arial" pitchFamily="34" charset="0"/>
                 <a:ea typeface="Arial" pitchFamily="34" charset="-122"/>
@@ -5378,7 +5378,7 @@
             <a:r>
               <a:rPr lang="en-US" sz="1050" dirty="0">
                 <a:solidFill>
-                  <a:srgbClr val="94A3B8"/>
+                  <a:srgbClr val="334155"/>
                 </a:solidFill>
                 <a:latin typeface="Arial" pitchFamily="34" charset="0"/>
                 <a:ea typeface="Arial" pitchFamily="34" charset="-122"/>
@@ -5405,11 +5405,11 @@
             <a:avLst/>
           </a:prstGeom>
           <a:solidFill>
-            <a:srgbClr val="131E32"/>
+            <a:srgbClr val="FFFFFF"/>
           </a:solidFill>
           <a:ln w="15240">
             <a:solidFill>
-              <a:srgbClr val="1E293B"/>
+              <a:srgbClr val="CBD5E1"/>
             </a:solidFill>
             <a:prstDash val="solid"/>
           </a:ln>
@@ -5430,11 +5430,11 @@
             <a:avLst/>
           </a:prstGeom>
           <a:solidFill>
-            <a:srgbClr val="38BDF8"/>
+            <a:srgbClr val="0284C7"/>
           </a:solidFill>
           <a:ln w="12700">
             <a:solidFill>
-              <a:srgbClr val="38BDF8"/>
+              <a:srgbClr val="0284C7"/>
             </a:solidFill>
             <a:prstDash val="solid"/>
           </a:ln>
@@ -5467,7 +5467,7 @@
             <a:r>
               <a:rPr lang="en-US" sz="1400" b="1" dirty="0">
                 <a:solidFill>
-                  <a:srgbClr val="FFFFFF"/>
+                  <a:srgbClr val="0F172A"/>
                 </a:solidFill>
                 <a:latin typeface="Arial" pitchFamily="34" charset="0"/>
                 <a:ea typeface="Arial" pitchFamily="34" charset="-122"/>
@@ -5509,7 +5509,7 @@
             <a:r>
               <a:rPr lang="en-US" sz="1050" dirty="0">
                 <a:solidFill>
-                  <a:srgbClr val="94A3B8"/>
+                  <a:srgbClr val="334155"/>
                 </a:solidFill>
                 <a:latin typeface="Arial" pitchFamily="34" charset="0"/>
                 <a:ea typeface="Arial" pitchFamily="34" charset="-122"/>
@@ -5535,7 +5535,7 @@
     <p:bg>
       <p:bgPr>
         <a:solidFill>
-          <a:srgbClr val="0A0F1D"/>
+          <a:srgbClr val="F8FAFC"/>
         </a:solidFill>
       </p:bgPr>
     </p:bg>
@@ -5568,11 +5568,11 @@
             <a:avLst/>
           </a:prstGeom>
           <a:solidFill>
-            <a:srgbClr val="2563EB"/>
+            <a:srgbClr val="0284C7"/>
           </a:solidFill>
           <a:ln w="12700">
             <a:solidFill>
-              <a:srgbClr val="2563EB"/>
+              <a:srgbClr val="0284C7"/>
             </a:solidFill>
             <a:prstDash val="solid"/>
           </a:ln>
@@ -5594,8 +5594,8 @@
         </p:blipFill>
         <p:spPr>
           <a:xfrm>
-            <a:off x="640080" y="228600"/>
-            <a:ext cx="1828800" cy="457200"/>
+            <a:off x="640080" y="201168"/>
+            <a:ext cx="1920240" cy="475488"/>
           </a:xfrm>
           <a:prstGeom prst="rect">
             <a:avLst/>
@@ -5610,32 +5610,96 @@
         </p:nvSpPr>
         <p:spPr>
           <a:xfrm>
-            <a:off x="2743200" y="274320"/>
+            <a:off x="2834640" y="256032"/>
+            <a:ext cx="3017520" cy="347472"/>
+          </a:xfrm>
+          <a:prstGeom prst="roundRect">
+            <a:avLst/>
+          </a:prstGeom>
+          <a:solidFill>
+            <a:srgbClr val="E0F2FE"/>
+          </a:solidFill>
+          <a:ln w="15240">
+            <a:solidFill>
+              <a:srgbClr val="BAE6FD"/>
+            </a:solidFill>
+            <a:prstDash val="solid"/>
+          </a:ln>
+        </p:spPr>
+      </p:sp>
+      <p:sp>
+        <p:nvSpPr>
+          <p:cNvPr id="5" name="Text 2"/>
+          <p:cNvSpPr/>
+          <p:nvPr/>
+        </p:nvSpPr>
+        <p:spPr>
+          <a:xfrm>
+            <a:off x="2834640" y="256032"/>
+            <a:ext cx="3017520" cy="347472"/>
+          </a:xfrm>
+          <a:prstGeom prst="rect">
+            <a:avLst/>
+          </a:prstGeom>
+          <a:noFill/>
+          <a:ln/>
+        </p:spPr>
+        <p:txBody>
+          <a:bodyPr wrap="square" rtlCol="0" anchor="ctr"/>
+          <a:lstStyle/>
+          <a:p>
+            <a:pPr algn="ctr" indent="0" marL="0">
+              <a:buNone/>
+            </a:pPr>
+            <a:r>
+              <a:rPr lang="en-US" sz="950" b="1" dirty="0">
+                <a:solidFill>
+                  <a:srgbClr val="0369A1"/>
+                </a:solidFill>
+                <a:latin typeface="Arial" pitchFamily="34" charset="0"/>
+                <a:ea typeface="Arial" pitchFamily="34" charset="-122"/>
+                <a:cs typeface="Arial" pitchFamily="34" charset="-120"/>
+              </a:rPr>
+              <a:t>ARSITEKTUR PLATFORM</a:t>
+            </a:r>
+            <a:endParaRPr lang="en-US" sz="950" dirty="0"/>
+          </a:p>
+        </p:txBody>
+      </p:sp>
+      <p:sp>
+        <p:nvSpPr>
+          <p:cNvPr id="6" name="Shape 3"/>
+          <p:cNvSpPr/>
+          <p:nvPr/>
+        </p:nvSpPr>
+        <p:spPr>
+          <a:xfrm>
+            <a:off x="8595360" y="256032"/>
             <a:ext cx="2926080" cy="347472"/>
           </a:xfrm>
           <a:prstGeom prst="roundRect">
             <a:avLst/>
           </a:prstGeom>
           <a:solidFill>
-            <a:srgbClr val="0F172A"/>
+            <a:srgbClr val="FEF3C7"/>
           </a:solidFill>
           <a:ln w="15240">
             <a:solidFill>
-              <a:srgbClr val="2563EB"/>
-            </a:solidFill>
-            <a:prstDash val="solid"/>
-          </a:ln>
-        </p:spPr>
-      </p:sp>
-      <p:sp>
-        <p:nvSpPr>
-          <p:cNvPr id="5" name="Text 2"/>
-          <p:cNvSpPr/>
-          <p:nvPr/>
-        </p:nvSpPr>
-        <p:spPr>
-          <a:xfrm>
-            <a:off x="2743200" y="274320"/>
+              <a:srgbClr val="FCD34D"/>
+            </a:solidFill>
+            <a:prstDash val="solid"/>
+          </a:ln>
+        </p:spPr>
+      </p:sp>
+      <p:sp>
+        <p:nvSpPr>
+          <p:cNvPr id="7" name="Text 4"/>
+          <p:cNvSpPr/>
+          <p:nvPr/>
+        </p:nvSpPr>
+        <p:spPr>
+          <a:xfrm>
+            <a:off x="8595360" y="256032"/>
             <a:ext cx="2926080" cy="347472"/>
           </a:xfrm>
           <a:prstGeom prst="rect">
@@ -5652,73 +5716,9 @@
               <a:buNone/>
             </a:pPr>
             <a:r>
-              <a:rPr lang="en-US" sz="900" b="1" dirty="0">
-                <a:solidFill>
-                  <a:srgbClr val="38BDF8"/>
-                </a:solidFill>
-                <a:latin typeface="Arial" pitchFamily="34" charset="0"/>
-                <a:ea typeface="Arial" pitchFamily="34" charset="-122"/>
-                <a:cs typeface="Arial" pitchFamily="34" charset="-120"/>
-              </a:rPr>
-              <a:t>ARSITEKTUR PLATFORM</a:t>
-            </a:r>
-            <a:endParaRPr lang="en-US" sz="900" dirty="0"/>
-          </a:p>
-        </p:txBody>
-      </p:sp>
-      <p:sp>
-        <p:nvSpPr>
-          <p:cNvPr id="6" name="Shape 3"/>
-          <p:cNvSpPr/>
-          <p:nvPr/>
-        </p:nvSpPr>
-        <p:spPr>
-          <a:xfrm>
-            <a:off x="8778240" y="274320"/>
-            <a:ext cx="2743200" cy="347472"/>
-          </a:xfrm>
-          <a:prstGeom prst="roundRect">
-            <a:avLst/>
-          </a:prstGeom>
-          <a:solidFill>
-            <a:srgbClr val="1C1917"/>
-          </a:solidFill>
-          <a:ln w="15240">
-            <a:solidFill>
-              <a:srgbClr val="F59E0B"/>
-            </a:solidFill>
-            <a:prstDash val="solid"/>
-          </a:ln>
-        </p:spPr>
-      </p:sp>
-      <p:sp>
-        <p:nvSpPr>
-          <p:cNvPr id="7" name="Text 4"/>
-          <p:cNvSpPr/>
-          <p:nvPr/>
-        </p:nvSpPr>
-        <p:spPr>
-          <a:xfrm>
-            <a:off x="8778240" y="274320"/>
-            <a:ext cx="2743200" cy="347472"/>
-          </a:xfrm>
-          <a:prstGeom prst="rect">
-            <a:avLst/>
-          </a:prstGeom>
-          <a:noFill/>
-          <a:ln/>
-        </p:spPr>
-        <p:txBody>
-          <a:bodyPr wrap="square" rtlCol="0" anchor="ctr"/>
-          <a:lstStyle/>
-          <a:p>
-            <a:pPr algn="ctr" indent="0" marL="0">
-              <a:buNone/>
-            </a:pPr>
-            <a:r>
-              <a:rPr lang="en-US" sz="900" b="1" dirty="0">
-                <a:solidFill>
-                  <a:srgbClr val="F59E0B"/>
+              <a:rPr lang="en-US" sz="950" b="1" dirty="0">
+                <a:solidFill>
+                  <a:srgbClr val="D97706"/>
                 </a:solidFill>
                 <a:latin typeface="Arial" pitchFamily="34" charset="0"/>
                 <a:ea typeface="Arial" pitchFamily="34" charset="-122"/>
@@ -5726,7 +5726,7 @@
               </a:rPr>
               <a:t>👑 Sesi Khusus Kepala Sekolah</a:t>
             </a:r>
-            <a:endParaRPr lang="en-US" sz="900" dirty="0"/>
+            <a:endParaRPr lang="en-US" sz="950" dirty="0"/>
           </a:p>
         </p:txBody>
       </p:sp>
@@ -5757,7 +5757,7 @@
             <a:r>
               <a:rPr lang="en-US" sz="2200" b="1" dirty="0">
                 <a:solidFill>
-                  <a:srgbClr val="FFFFFF"/>
+                  <a:srgbClr val="0F172A"/>
                 </a:solidFill>
                 <a:latin typeface="Arial" pitchFamily="34" charset="0"/>
                 <a:ea typeface="Arial" pitchFamily="34" charset="-122"/>
@@ -5786,7 +5786,7 @@
           <a:noFill/>
           <a:ln w="15240">
             <a:solidFill>
-              <a:srgbClr val="1E293B"/>
+              <a:srgbClr val="E2E8F0"/>
             </a:solidFill>
             <a:prstDash val="solid"/>
           </a:ln>
@@ -5858,7 +5858,7 @@
             <a:r>
               <a:rPr lang="en-US" sz="900" b="1" dirty="0">
                 <a:solidFill>
-                  <a:srgbClr val="94A3B8"/>
+                  <a:srgbClr val="0369A1"/>
                 </a:solidFill>
                 <a:latin typeface="Arial" pitchFamily="34" charset="0"/>
                 <a:ea typeface="Arial" pitchFamily="34" charset="-122"/>
@@ -5885,11 +5885,11 @@
             <a:avLst/>
           </a:prstGeom>
           <a:solidFill>
-            <a:srgbClr val="131E32"/>
+            <a:srgbClr val="FFFFFF"/>
           </a:solidFill>
           <a:ln w="22860">
             <a:solidFill>
-              <a:srgbClr val="2563EB"/>
+              <a:srgbClr val="0284C7"/>
             </a:solidFill>
             <a:prstDash val="solid"/>
           </a:ln>
@@ -5910,11 +5910,11 @@
             <a:avLst/>
           </a:prstGeom>
           <a:solidFill>
-            <a:srgbClr val="0F172A"/>
+            <a:srgbClr val="E0F2FE"/>
           </a:solidFill>
           <a:ln w="12700">
             <a:solidFill>
-              <a:srgbClr val="2563EB"/>
+              <a:srgbClr val="0284C7"/>
             </a:solidFill>
             <a:prstDash val="solid"/>
           </a:ln>
@@ -5947,7 +5947,7 @@
             <a:r>
               <a:rPr lang="en-US" sz="1300" b="1" dirty="0">
                 <a:solidFill>
-                  <a:srgbClr val="FFFFFF"/>
+                  <a:srgbClr val="0F172A"/>
                 </a:solidFill>
                 <a:latin typeface="Arial" pitchFamily="34" charset="0"/>
                 <a:ea typeface="Arial" pitchFamily="34" charset="-122"/>
@@ -5989,7 +5989,7 @@
             <a:r>
               <a:rPr lang="en-US" sz="1100" dirty="0">
                 <a:solidFill>
-                  <a:srgbClr val="94A3B8"/>
+                  <a:srgbClr val="334155"/>
                 </a:solidFill>
                 <a:latin typeface="Arial" pitchFamily="34" charset="0"/>
                 <a:ea typeface="Arial" pitchFamily="34" charset="-122"/>
@@ -6018,7 +6018,7 @@
             <a:r>
               <a:rPr lang="en-US" sz="1100" dirty="0">
                 <a:solidFill>
-                  <a:srgbClr val="94A3B8"/>
+                  <a:srgbClr val="334155"/>
                 </a:solidFill>
                 <a:latin typeface="Arial" pitchFamily="34" charset="0"/>
                 <a:ea typeface="Arial" pitchFamily="34" charset="-122"/>
@@ -6047,7 +6047,7 @@
             <a:r>
               <a:rPr lang="en-US" sz="1100" dirty="0">
                 <a:solidFill>
-                  <a:srgbClr val="94A3B8"/>
+                  <a:srgbClr val="334155"/>
                 </a:solidFill>
                 <a:latin typeface="Arial" pitchFamily="34" charset="0"/>
                 <a:ea typeface="Arial" pitchFamily="34" charset="-122"/>
@@ -6076,7 +6076,7 @@
             <a:r>
               <a:rPr lang="en-US" sz="1100" dirty="0">
                 <a:solidFill>
-                  <a:srgbClr val="94A3B8"/>
+                  <a:srgbClr val="334155"/>
                 </a:solidFill>
                 <a:latin typeface="Arial" pitchFamily="34" charset="0"/>
                 <a:ea typeface="Arial" pitchFamily="34" charset="-122"/>
@@ -6103,11 +6103,11 @@
             <a:avLst/>
           </a:prstGeom>
           <a:solidFill>
-            <a:srgbClr val="131E32"/>
+            <a:srgbClr val="FFFFFF"/>
           </a:solidFill>
           <a:ln w="22860">
             <a:solidFill>
-              <a:srgbClr val="10B981"/>
+              <a:srgbClr val="059669"/>
             </a:solidFill>
             <a:prstDash val="solid"/>
           </a:ln>
@@ -6128,11 +6128,11 @@
             <a:avLst/>
           </a:prstGeom>
           <a:solidFill>
-            <a:srgbClr val="0F172A"/>
+            <a:srgbClr val="D1FAE5"/>
           </a:solidFill>
           <a:ln w="12700">
             <a:solidFill>
-              <a:srgbClr val="10B981"/>
+              <a:srgbClr val="059669"/>
             </a:solidFill>
             <a:prstDash val="solid"/>
           </a:ln>
@@ -6165,7 +6165,7 @@
             <a:r>
               <a:rPr lang="en-US" sz="1300" b="1" dirty="0">
                 <a:solidFill>
-                  <a:srgbClr val="FFFFFF"/>
+                  <a:srgbClr val="0F172A"/>
                 </a:solidFill>
                 <a:latin typeface="Arial" pitchFamily="34" charset="0"/>
                 <a:ea typeface="Arial" pitchFamily="34" charset="-122"/>
@@ -6207,7 +6207,7 @@
             <a:r>
               <a:rPr lang="en-US" sz="1100" dirty="0">
                 <a:solidFill>
-                  <a:srgbClr val="94A3B8"/>
+                  <a:srgbClr val="334155"/>
                 </a:solidFill>
                 <a:latin typeface="Arial" pitchFamily="34" charset="0"/>
                 <a:ea typeface="Arial" pitchFamily="34" charset="-122"/>
@@ -6236,7 +6236,7 @@
             <a:r>
               <a:rPr lang="en-US" sz="1100" dirty="0">
                 <a:solidFill>
-                  <a:srgbClr val="94A3B8"/>
+                  <a:srgbClr val="334155"/>
                 </a:solidFill>
                 <a:latin typeface="Arial" pitchFamily="34" charset="0"/>
                 <a:ea typeface="Arial" pitchFamily="34" charset="-122"/>
@@ -6265,7 +6265,7 @@
             <a:r>
               <a:rPr lang="en-US" sz="1100" dirty="0">
                 <a:solidFill>
-                  <a:srgbClr val="94A3B8"/>
+                  <a:srgbClr val="334155"/>
                 </a:solidFill>
                 <a:latin typeface="Arial" pitchFamily="34" charset="0"/>
                 <a:ea typeface="Arial" pitchFamily="34" charset="-122"/>
@@ -6294,7 +6294,7 @@
             <a:r>
               <a:rPr lang="en-US" sz="1100" dirty="0">
                 <a:solidFill>
-                  <a:srgbClr val="94A3B8"/>
+                  <a:srgbClr val="334155"/>
                 </a:solidFill>
                 <a:latin typeface="Arial" pitchFamily="34" charset="0"/>
                 <a:ea typeface="Arial" pitchFamily="34" charset="-122"/>
@@ -6321,11 +6321,11 @@
             <a:avLst/>
           </a:prstGeom>
           <a:solidFill>
-            <a:srgbClr val="131E32"/>
+            <a:srgbClr val="FFFFFF"/>
           </a:solidFill>
           <a:ln w="22860">
             <a:solidFill>
-              <a:srgbClr val="F59E0B"/>
+              <a:srgbClr val="D97706"/>
             </a:solidFill>
             <a:prstDash val="solid"/>
           </a:ln>
@@ -6346,11 +6346,11 @@
             <a:avLst/>
           </a:prstGeom>
           <a:solidFill>
-            <a:srgbClr val="0F172A"/>
+            <a:srgbClr val="FEF3C7"/>
           </a:solidFill>
           <a:ln w="12700">
             <a:solidFill>
-              <a:srgbClr val="F59E0B"/>
+              <a:srgbClr val="D97706"/>
             </a:solidFill>
             <a:prstDash val="solid"/>
           </a:ln>
@@ -6383,7 +6383,7 @@
             <a:r>
               <a:rPr lang="en-US" sz="1300" b="1" dirty="0">
                 <a:solidFill>
-                  <a:srgbClr val="FFFFFF"/>
+                  <a:srgbClr val="0F172A"/>
                 </a:solidFill>
                 <a:latin typeface="Arial" pitchFamily="34" charset="0"/>
                 <a:ea typeface="Arial" pitchFamily="34" charset="-122"/>
@@ -6425,7 +6425,7 @@
             <a:r>
               <a:rPr lang="en-US" sz="1100" dirty="0">
                 <a:solidFill>
-                  <a:srgbClr val="94A3B8"/>
+                  <a:srgbClr val="334155"/>
                 </a:solidFill>
                 <a:latin typeface="Arial" pitchFamily="34" charset="0"/>
                 <a:ea typeface="Arial" pitchFamily="34" charset="-122"/>
@@ -6454,7 +6454,7 @@
             <a:r>
               <a:rPr lang="en-US" sz="1100" dirty="0">
                 <a:solidFill>
-                  <a:srgbClr val="94A3B8"/>
+                  <a:srgbClr val="334155"/>
                 </a:solidFill>
                 <a:latin typeface="Arial" pitchFamily="34" charset="0"/>
                 <a:ea typeface="Arial" pitchFamily="34" charset="-122"/>
@@ -6483,7 +6483,7 @@
             <a:r>
               <a:rPr lang="en-US" sz="1100" dirty="0">
                 <a:solidFill>
-                  <a:srgbClr val="94A3B8"/>
+                  <a:srgbClr val="334155"/>
                 </a:solidFill>
                 <a:latin typeface="Arial" pitchFamily="34" charset="0"/>
                 <a:ea typeface="Arial" pitchFamily="34" charset="-122"/>
@@ -6512,7 +6512,7 @@
             <a:r>
               <a:rPr lang="en-US" sz="1100" dirty="0">
                 <a:solidFill>
-                  <a:srgbClr val="94A3B8"/>
+                  <a:srgbClr val="334155"/>
                 </a:solidFill>
                 <a:latin typeface="Arial" pitchFamily="34" charset="0"/>
                 <a:ea typeface="Arial" pitchFamily="34" charset="-122"/>
@@ -6538,7 +6538,7 @@
     <p:bg>
       <p:bgPr>
         <a:solidFill>
-          <a:srgbClr val="0A0F1D"/>
+          <a:srgbClr val="F8FAFC"/>
         </a:solidFill>
       </p:bgPr>
     </p:bg>
@@ -6571,11 +6571,11 @@
             <a:avLst/>
           </a:prstGeom>
           <a:solidFill>
-            <a:srgbClr val="2563EB"/>
+            <a:srgbClr val="0284C7"/>
           </a:solidFill>
           <a:ln w="12700">
             <a:solidFill>
-              <a:srgbClr val="2563EB"/>
+              <a:srgbClr val="0284C7"/>
             </a:solidFill>
             <a:prstDash val="solid"/>
           </a:ln>
@@ -6597,8 +6597,8 @@
         </p:blipFill>
         <p:spPr>
           <a:xfrm>
-            <a:off x="640080" y="228600"/>
-            <a:ext cx="1828800" cy="457200"/>
+            <a:off x="640080" y="201168"/>
+            <a:ext cx="1920240" cy="475488"/>
           </a:xfrm>
           <a:prstGeom prst="rect">
             <a:avLst/>
@@ -6613,32 +6613,96 @@
         </p:nvSpPr>
         <p:spPr>
           <a:xfrm>
-            <a:off x="2743200" y="274320"/>
+            <a:off x="2834640" y="256032"/>
+            <a:ext cx="3017520" cy="347472"/>
+          </a:xfrm>
+          <a:prstGeom prst="roundRect">
+            <a:avLst/>
+          </a:prstGeom>
+          <a:solidFill>
+            <a:srgbClr val="E0F2FE"/>
+          </a:solidFill>
+          <a:ln w="15240">
+            <a:solidFill>
+              <a:srgbClr val="BAE6FD"/>
+            </a:solidFill>
+            <a:prstDash val="solid"/>
+          </a:ln>
+        </p:spPr>
+      </p:sp>
+      <p:sp>
+        <p:nvSpPr>
+          <p:cNvPr id="5" name="Text 2"/>
+          <p:cNvSpPr/>
+          <p:nvPr/>
+        </p:nvSpPr>
+        <p:spPr>
+          <a:xfrm>
+            <a:off x="2834640" y="256032"/>
+            <a:ext cx="3017520" cy="347472"/>
+          </a:xfrm>
+          <a:prstGeom prst="rect">
+            <a:avLst/>
+          </a:prstGeom>
+          <a:noFill/>
+          <a:ln/>
+        </p:spPr>
+        <p:txBody>
+          <a:bodyPr wrap="square" rtlCol="0" anchor="ctr"/>
+          <a:lstStyle/>
+          <a:p>
+            <a:pPr algn="ctr" indent="0" marL="0">
+              <a:buNone/>
+            </a:pPr>
+            <a:r>
+              <a:rPr lang="en-US" sz="950" b="1" dirty="0">
+                <a:solidFill>
+                  <a:srgbClr val="0369A1"/>
+                </a:solidFill>
+                <a:latin typeface="Arial" pitchFamily="34" charset="0"/>
+                <a:ea typeface="Arial" pitchFamily="34" charset="-122"/>
+                <a:cs typeface="Arial" pitchFamily="34" charset="-120"/>
+              </a:rPr>
+              <a:t>PANEL KEPALA SEKOLAH</a:t>
+            </a:r>
+            <a:endParaRPr lang="en-US" sz="950" dirty="0"/>
+          </a:p>
+        </p:txBody>
+      </p:sp>
+      <p:sp>
+        <p:nvSpPr>
+          <p:cNvPr id="6" name="Shape 3"/>
+          <p:cNvSpPr/>
+          <p:nvPr/>
+        </p:nvSpPr>
+        <p:spPr>
+          <a:xfrm>
+            <a:off x="8595360" y="256032"/>
             <a:ext cx="2926080" cy="347472"/>
           </a:xfrm>
           <a:prstGeom prst="roundRect">
             <a:avLst/>
           </a:prstGeom>
           <a:solidFill>
-            <a:srgbClr val="0F172A"/>
+            <a:srgbClr val="FEF3C7"/>
           </a:solidFill>
           <a:ln w="15240">
             <a:solidFill>
-              <a:srgbClr val="2563EB"/>
-            </a:solidFill>
-            <a:prstDash val="solid"/>
-          </a:ln>
-        </p:spPr>
-      </p:sp>
-      <p:sp>
-        <p:nvSpPr>
-          <p:cNvPr id="5" name="Text 2"/>
-          <p:cNvSpPr/>
-          <p:nvPr/>
-        </p:nvSpPr>
-        <p:spPr>
-          <a:xfrm>
-            <a:off x="2743200" y="274320"/>
+              <a:srgbClr val="FCD34D"/>
+            </a:solidFill>
+            <a:prstDash val="solid"/>
+          </a:ln>
+        </p:spPr>
+      </p:sp>
+      <p:sp>
+        <p:nvSpPr>
+          <p:cNvPr id="7" name="Text 4"/>
+          <p:cNvSpPr/>
+          <p:nvPr/>
+        </p:nvSpPr>
+        <p:spPr>
+          <a:xfrm>
+            <a:off x="8595360" y="256032"/>
             <a:ext cx="2926080" cy="347472"/>
           </a:xfrm>
           <a:prstGeom prst="rect">
@@ -6655,73 +6719,9 @@
               <a:buNone/>
             </a:pPr>
             <a:r>
-              <a:rPr lang="en-US" sz="900" b="1" dirty="0">
-                <a:solidFill>
-                  <a:srgbClr val="38BDF8"/>
-                </a:solidFill>
-                <a:latin typeface="Arial" pitchFamily="34" charset="0"/>
-                <a:ea typeface="Arial" pitchFamily="34" charset="-122"/>
-                <a:cs typeface="Arial" pitchFamily="34" charset="-120"/>
-              </a:rPr>
-              <a:t>PANEL KEPALA SEKOLAH</a:t>
-            </a:r>
-            <a:endParaRPr lang="en-US" sz="900" dirty="0"/>
-          </a:p>
-        </p:txBody>
-      </p:sp>
-      <p:sp>
-        <p:nvSpPr>
-          <p:cNvPr id="6" name="Shape 3"/>
-          <p:cNvSpPr/>
-          <p:nvPr/>
-        </p:nvSpPr>
-        <p:spPr>
-          <a:xfrm>
-            <a:off x="8778240" y="274320"/>
-            <a:ext cx="2743200" cy="347472"/>
-          </a:xfrm>
-          <a:prstGeom prst="roundRect">
-            <a:avLst/>
-          </a:prstGeom>
-          <a:solidFill>
-            <a:srgbClr val="1C1917"/>
-          </a:solidFill>
-          <a:ln w="15240">
-            <a:solidFill>
-              <a:srgbClr val="F59E0B"/>
-            </a:solidFill>
-            <a:prstDash val="solid"/>
-          </a:ln>
-        </p:spPr>
-      </p:sp>
-      <p:sp>
-        <p:nvSpPr>
-          <p:cNvPr id="7" name="Text 4"/>
-          <p:cNvSpPr/>
-          <p:nvPr/>
-        </p:nvSpPr>
-        <p:spPr>
-          <a:xfrm>
-            <a:off x="8778240" y="274320"/>
-            <a:ext cx="2743200" cy="347472"/>
-          </a:xfrm>
-          <a:prstGeom prst="rect">
-            <a:avLst/>
-          </a:prstGeom>
-          <a:noFill/>
-          <a:ln/>
-        </p:spPr>
-        <p:txBody>
-          <a:bodyPr wrap="square" rtlCol="0" anchor="ctr"/>
-          <a:lstStyle/>
-          <a:p>
-            <a:pPr algn="ctr" indent="0" marL="0">
-              <a:buNone/>
-            </a:pPr>
-            <a:r>
-              <a:rPr lang="en-US" sz="900" b="1" dirty="0">
-                <a:solidFill>
-                  <a:srgbClr val="F59E0B"/>
+              <a:rPr lang="en-US" sz="950" b="1" dirty="0">
+                <a:solidFill>
+                  <a:srgbClr val="D97706"/>
                 </a:solidFill>
                 <a:latin typeface="Arial" pitchFamily="34" charset="0"/>
                 <a:ea typeface="Arial" pitchFamily="34" charset="-122"/>
@@ -6729,7 +6729,7 @@
               </a:rPr>
               <a:t>👑 Sesi Khusus Kepala Sekolah</a:t>
             </a:r>
-            <a:endParaRPr lang="en-US" sz="900" dirty="0"/>
+            <a:endParaRPr lang="en-US" sz="950" dirty="0"/>
           </a:p>
         </p:txBody>
       </p:sp>
@@ -6760,7 +6760,7 @@
             <a:r>
               <a:rPr lang="en-US" sz="2200" b="1" dirty="0">
                 <a:solidFill>
-                  <a:srgbClr val="FFFFFF"/>
+                  <a:srgbClr val="0F172A"/>
                 </a:solidFill>
                 <a:latin typeface="Arial" pitchFamily="34" charset="0"/>
                 <a:ea typeface="Arial" pitchFamily="34" charset="-122"/>
@@ -6789,7 +6789,7 @@
           <a:noFill/>
           <a:ln w="15240">
             <a:solidFill>
-              <a:srgbClr val="1E293B"/>
+              <a:srgbClr val="E2E8F0"/>
             </a:solidFill>
             <a:prstDash val="solid"/>
           </a:ln>
@@ -6861,7 +6861,7 @@
             <a:r>
               <a:rPr lang="en-US" sz="900" b="1" dirty="0">
                 <a:solidFill>
-                  <a:srgbClr val="94A3B8"/>
+                  <a:srgbClr val="0369A1"/>
                 </a:solidFill>
                 <a:latin typeface="Arial" pitchFamily="34" charset="0"/>
                 <a:ea typeface="Arial" pitchFamily="34" charset="-122"/>
@@ -6888,11 +6888,11 @@
             <a:avLst/>
           </a:prstGeom>
           <a:solidFill>
-            <a:srgbClr val="131E32"/>
+            <a:srgbClr val="FFFFFF"/>
           </a:solidFill>
           <a:ln w="15240">
             <a:solidFill>
-              <a:srgbClr val="1E293B"/>
+              <a:srgbClr val="CBD5E1"/>
             </a:solidFill>
             <a:prstDash val="solid"/>
           </a:ln>
@@ -6925,7 +6925,7 @@
             <a:r>
               <a:rPr lang="en-US" sz="1400" b="1" dirty="0">
                 <a:solidFill>
-                  <a:srgbClr val="38BDF8"/>
+                  <a:srgbClr val="0369A1"/>
                 </a:solidFill>
                 <a:latin typeface="Arial" pitchFamily="34" charset="0"/>
                 <a:ea typeface="Arial" pitchFamily="34" charset="-122"/>
@@ -6967,7 +6967,7 @@
             <a:r>
               <a:rPr lang="en-US" sz="1100" b="1" dirty="0">
                 <a:solidFill>
-                  <a:srgbClr val="FFFFFF"/>
+                  <a:srgbClr val="0F172A"/>
                 </a:solidFill>
                 <a:latin typeface="Arial" pitchFamily="34" charset="0"/>
                 <a:ea typeface="Arial" pitchFamily="34" charset="-122"/>
@@ -6985,7 +6985,7 @@
             <a:r>
               <a:rPr lang="en-US" sz="1000" dirty="0">
                 <a:solidFill>
-                  <a:srgbClr val="94A3B8"/>
+                  <a:srgbClr val="334155"/>
                 </a:solidFill>
                 <a:latin typeface="Arial" pitchFamily="34" charset="0"/>
                 <a:ea typeface="Arial" pitchFamily="34" charset="-122"/>
@@ -7003,7 +7003,7 @@
             <a:r>
               <a:rPr lang="en-US" sz="1100" b="1" dirty="0">
                 <a:solidFill>
-                  <a:srgbClr val="FFFFFF"/>
+                  <a:srgbClr val="0F172A"/>
                 </a:solidFill>
                 <a:latin typeface="Arial" pitchFamily="34" charset="0"/>
                 <a:ea typeface="Arial" pitchFamily="34" charset="-122"/>
@@ -7021,7 +7021,7 @@
             <a:r>
               <a:rPr lang="en-US" sz="1000" dirty="0">
                 <a:solidFill>
-                  <a:srgbClr val="94A3B8"/>
+                  <a:srgbClr val="334155"/>
                 </a:solidFill>
                 <a:latin typeface="Arial" pitchFamily="34" charset="0"/>
                 <a:ea typeface="Arial" pitchFamily="34" charset="-122"/>
@@ -7039,7 +7039,7 @@
             <a:r>
               <a:rPr lang="en-US" sz="1100" b="1" dirty="0">
                 <a:solidFill>
-                  <a:srgbClr val="FFFFFF"/>
+                  <a:srgbClr val="0F172A"/>
                 </a:solidFill>
                 <a:latin typeface="Arial" pitchFamily="34" charset="0"/>
                 <a:ea typeface="Arial" pitchFamily="34" charset="-122"/>
@@ -7057,7 +7057,7 @@
             <a:r>
               <a:rPr lang="en-US" sz="1000" dirty="0">
                 <a:solidFill>
-                  <a:srgbClr val="94A3B8"/>
+                  <a:srgbClr val="334155"/>
                 </a:solidFill>
                 <a:latin typeface="Arial" pitchFamily="34" charset="0"/>
                 <a:ea typeface="Arial" pitchFamily="34" charset="-122"/>
@@ -7075,7 +7075,7 @@
             <a:r>
               <a:rPr lang="en-US" sz="1100" b="1" dirty="0">
                 <a:solidFill>
-                  <a:srgbClr val="FFFFFF"/>
+                  <a:srgbClr val="0F172A"/>
                 </a:solidFill>
                 <a:latin typeface="Arial" pitchFamily="34" charset="0"/>
                 <a:ea typeface="Arial" pitchFamily="34" charset="-122"/>
@@ -7093,7 +7093,7 @@
             <a:r>
               <a:rPr lang="en-US" sz="1000" dirty="0">
                 <a:solidFill>
-                  <a:srgbClr val="94A3B8"/>
+                  <a:srgbClr val="334155"/>
                 </a:solidFill>
                 <a:latin typeface="Arial" pitchFamily="34" charset="0"/>
                 <a:ea typeface="Arial" pitchFamily="34" charset="-122"/>
@@ -7120,11 +7120,11 @@
             <a:avLst/>
           </a:prstGeom>
           <a:solidFill>
-            <a:srgbClr val="0F172A"/>
+            <a:srgbClr val="FFFFFF"/>
           </a:solidFill>
           <a:ln w="19050">
             <a:solidFill>
-              <a:srgbClr val="334155"/>
+              <a:srgbClr val="CBD5E1"/>
             </a:solidFill>
             <a:prstDash val="solid"/>
           </a:ln>
@@ -7139,17 +7139,17 @@
         <p:spPr>
           <a:xfrm>
             <a:off x="6217920" y="1600200"/>
-            <a:ext cx="5303520" cy="320040"/>
-          </a:xfrm>
-          <a:prstGeom prst="rect">
-            <a:avLst/>
-          </a:prstGeom>
-          <a:solidFill>
-            <a:srgbClr val="1E293B"/>
+            <a:ext cx="5303520" cy="347472"/>
+          </a:xfrm>
+          <a:prstGeom prst="rect">
+            <a:avLst/>
+          </a:prstGeom>
+          <a:solidFill>
+            <a:srgbClr val="F1F5F9"/>
           </a:solidFill>
           <a:ln w="12700">
             <a:solidFill>
-              <a:srgbClr val="1E293B"/>
+              <a:srgbClr val="E2E8F0"/>
             </a:solidFill>
             <a:prstDash val="solid"/>
           </a:ln>
@@ -7163,7 +7163,7 @@
         </p:nvSpPr>
         <p:spPr>
           <a:xfrm>
-            <a:off x="6355080" y="1700784"/>
+            <a:off x="6355080" y="1709928"/>
             <a:ext cx="118872" cy="118872"/>
           </a:xfrm>
           <a:prstGeom prst="ellipse">
@@ -7188,7 +7188,7 @@
         </p:nvSpPr>
         <p:spPr>
           <a:xfrm>
-            <a:off x="6537960" y="1700784"/>
+            <a:off x="6537960" y="1709928"/>
             <a:ext cx="118872" cy="118872"/>
           </a:xfrm>
           <a:prstGeom prst="ellipse">
@@ -7213,7 +7213,7 @@
         </p:nvSpPr>
         <p:spPr>
           <a:xfrm>
-            <a:off x="6720840" y="1700784"/>
+            <a:off x="6720840" y="1709928"/>
             <a:ext cx="118872" cy="118872"/>
           </a:xfrm>
           <a:prstGeom prst="ellipse">
@@ -7239,17 +7239,17 @@
         <p:spPr>
           <a:xfrm>
             <a:off x="6995160" y="1664208"/>
-            <a:ext cx="4389120" cy="201168"/>
+            <a:ext cx="4389120" cy="219456"/>
           </a:xfrm>
           <a:prstGeom prst="roundRect">
             <a:avLst/>
           </a:prstGeom>
           <a:solidFill>
-            <a:srgbClr val="0F172A"/>
+            <a:srgbClr val="FFFFFF"/>
           </a:solidFill>
           <a:ln w="10160">
             <a:solidFill>
-              <a:srgbClr val="334155"/>
+              <a:srgbClr val="CBD5E1"/>
             </a:solidFill>
             <a:prstDash val="solid"/>
           </a:ln>
@@ -7264,7 +7264,7 @@
         <p:spPr>
           <a:xfrm>
             <a:off x="7086600" y="1664208"/>
-            <a:ext cx="4206240" cy="201168"/>
+            <a:ext cx="4206240" cy="219456"/>
           </a:xfrm>
           <a:prstGeom prst="rect">
             <a:avLst/>
@@ -7280,7 +7280,7 @@
               <a:buNone/>
             </a:pPr>
             <a:r>
-              <a:rPr lang="en-US" sz="750" dirty="0">
+              <a:rPr lang="en-US" sz="800" dirty="0">
                 <a:solidFill>
                   <a:srgbClr val="64748B"/>
                 </a:solidFill>
@@ -7288,9 +7288,9 @@
                 <a:ea typeface="Arial" pitchFamily="34" charset="-122"/>
                 <a:cs typeface="Arial" pitchFamily="34" charset="-120"/>
               </a:rPr>
-              <a:t>https://belajarplus.id/admin</a:t>
-            </a:r>
-            <a:endParaRPr lang="en-US" sz="750" dirty="0"/>
+              <a:t>🔒 https://belajarplus.id/admin</a:t>
+            </a:r>
+            <a:endParaRPr lang="en-US" sz="800" dirty="0"/>
           </a:p>
         </p:txBody>
       </p:sp>
@@ -7309,8 +7309,8 @@
         </p:blipFill>
         <p:spPr>
           <a:xfrm>
-            <a:off x="6263640" y="1938528"/>
-            <a:ext cx="5212080" cy="4187952"/>
+            <a:off x="6263640" y="1965960"/>
+            <a:ext cx="5212080" cy="4160520"/>
           </a:xfrm>
           <a:prstGeom prst="rect">
             <a:avLst/>
@@ -7331,7 +7331,7 @@
     <p:bg>
       <p:bgPr>
         <a:solidFill>
-          <a:srgbClr val="0A0F1D"/>
+          <a:srgbClr val="F8FAFC"/>
         </a:solidFill>
       </p:bgPr>
     </p:bg>
@@ -7364,11 +7364,11 @@
             <a:avLst/>
           </a:prstGeom>
           <a:solidFill>
-            <a:srgbClr val="2563EB"/>
+            <a:srgbClr val="0284C7"/>
           </a:solidFill>
           <a:ln w="12700">
             <a:solidFill>
-              <a:srgbClr val="2563EB"/>
+              <a:srgbClr val="0284C7"/>
             </a:solidFill>
             <a:prstDash val="solid"/>
           </a:ln>
@@ -7390,8 +7390,8 @@
         </p:blipFill>
         <p:spPr>
           <a:xfrm>
-            <a:off x="640080" y="228600"/>
-            <a:ext cx="1828800" cy="457200"/>
+            <a:off x="640080" y="201168"/>
+            <a:ext cx="1920240" cy="475488"/>
           </a:xfrm>
           <a:prstGeom prst="rect">
             <a:avLst/>
@@ -7406,32 +7406,96 @@
         </p:nvSpPr>
         <p:spPr>
           <a:xfrm>
-            <a:off x="2743200" y="274320"/>
+            <a:off x="2834640" y="256032"/>
+            <a:ext cx="3017520" cy="347472"/>
+          </a:xfrm>
+          <a:prstGeom prst="roundRect">
+            <a:avLst/>
+          </a:prstGeom>
+          <a:solidFill>
+            <a:srgbClr val="E0F2FE"/>
+          </a:solidFill>
+          <a:ln w="15240">
+            <a:solidFill>
+              <a:srgbClr val="BAE6FD"/>
+            </a:solidFill>
+            <a:prstDash val="solid"/>
+          </a:ln>
+        </p:spPr>
+      </p:sp>
+      <p:sp>
+        <p:nvSpPr>
+          <p:cNvPr id="5" name="Text 2"/>
+          <p:cNvSpPr/>
+          <p:nvPr/>
+        </p:nvSpPr>
+        <p:spPr>
+          <a:xfrm>
+            <a:off x="2834640" y="256032"/>
+            <a:ext cx="3017520" cy="347472"/>
+          </a:xfrm>
+          <a:prstGeom prst="rect">
+            <a:avLst/>
+          </a:prstGeom>
+          <a:noFill/>
+          <a:ln/>
+        </p:spPr>
+        <p:txBody>
+          <a:bodyPr wrap="square" rtlCol="0" anchor="ctr"/>
+          <a:lstStyle/>
+          <a:p>
+            <a:pPr algn="ctr" indent="0" marL="0">
+              <a:buNone/>
+            </a:pPr>
+            <a:r>
+              <a:rPr lang="en-US" sz="950" b="1" dirty="0">
+                <a:solidFill>
+                  <a:srgbClr val="0369A1"/>
+                </a:solidFill>
+                <a:latin typeface="Arial" pitchFamily="34" charset="0"/>
+                <a:ea typeface="Arial" pitchFamily="34" charset="-122"/>
+                <a:cs typeface="Arial" pitchFamily="34" charset="-120"/>
+              </a:rPr>
+              <a:t>PERSONALISASI PORTAL</a:t>
+            </a:r>
+            <a:endParaRPr lang="en-US" sz="950" dirty="0"/>
+          </a:p>
+        </p:txBody>
+      </p:sp>
+      <p:sp>
+        <p:nvSpPr>
+          <p:cNvPr id="6" name="Shape 3"/>
+          <p:cNvSpPr/>
+          <p:nvPr/>
+        </p:nvSpPr>
+        <p:spPr>
+          <a:xfrm>
+            <a:off x="8595360" y="256032"/>
             <a:ext cx="2926080" cy="347472"/>
           </a:xfrm>
           <a:prstGeom prst="roundRect">
             <a:avLst/>
           </a:prstGeom>
           <a:solidFill>
-            <a:srgbClr val="0F172A"/>
+            <a:srgbClr val="FEF3C7"/>
           </a:solidFill>
           <a:ln w="15240">
             <a:solidFill>
-              <a:srgbClr val="2563EB"/>
-            </a:solidFill>
-            <a:prstDash val="solid"/>
-          </a:ln>
-        </p:spPr>
-      </p:sp>
-      <p:sp>
-        <p:nvSpPr>
-          <p:cNvPr id="5" name="Text 2"/>
-          <p:cNvSpPr/>
-          <p:nvPr/>
-        </p:nvSpPr>
-        <p:spPr>
-          <a:xfrm>
-            <a:off x="2743200" y="274320"/>
+              <a:srgbClr val="FCD34D"/>
+            </a:solidFill>
+            <a:prstDash val="solid"/>
+          </a:ln>
+        </p:spPr>
+      </p:sp>
+      <p:sp>
+        <p:nvSpPr>
+          <p:cNvPr id="7" name="Text 4"/>
+          <p:cNvSpPr/>
+          <p:nvPr/>
+        </p:nvSpPr>
+        <p:spPr>
+          <a:xfrm>
+            <a:off x="8595360" y="256032"/>
             <a:ext cx="2926080" cy="347472"/>
           </a:xfrm>
           <a:prstGeom prst="rect">
@@ -7448,73 +7512,9 @@
               <a:buNone/>
             </a:pPr>
             <a:r>
-              <a:rPr lang="en-US" sz="900" b="1" dirty="0">
-                <a:solidFill>
-                  <a:srgbClr val="38BDF8"/>
-                </a:solidFill>
-                <a:latin typeface="Arial" pitchFamily="34" charset="0"/>
-                <a:ea typeface="Arial" pitchFamily="34" charset="-122"/>
-                <a:cs typeface="Arial" pitchFamily="34" charset="-120"/>
-              </a:rPr>
-              <a:t>PERSONALISASI PORTAL</a:t>
-            </a:r>
-            <a:endParaRPr lang="en-US" sz="900" dirty="0"/>
-          </a:p>
-        </p:txBody>
-      </p:sp>
-      <p:sp>
-        <p:nvSpPr>
-          <p:cNvPr id="6" name="Shape 3"/>
-          <p:cNvSpPr/>
-          <p:nvPr/>
-        </p:nvSpPr>
-        <p:spPr>
-          <a:xfrm>
-            <a:off x="8778240" y="274320"/>
-            <a:ext cx="2743200" cy="347472"/>
-          </a:xfrm>
-          <a:prstGeom prst="roundRect">
-            <a:avLst/>
-          </a:prstGeom>
-          <a:solidFill>
-            <a:srgbClr val="1C1917"/>
-          </a:solidFill>
-          <a:ln w="15240">
-            <a:solidFill>
-              <a:srgbClr val="F59E0B"/>
-            </a:solidFill>
-            <a:prstDash val="solid"/>
-          </a:ln>
-        </p:spPr>
-      </p:sp>
-      <p:sp>
-        <p:nvSpPr>
-          <p:cNvPr id="7" name="Text 4"/>
-          <p:cNvSpPr/>
-          <p:nvPr/>
-        </p:nvSpPr>
-        <p:spPr>
-          <a:xfrm>
-            <a:off x="8778240" y="274320"/>
-            <a:ext cx="2743200" cy="347472"/>
-          </a:xfrm>
-          <a:prstGeom prst="rect">
-            <a:avLst/>
-          </a:prstGeom>
-          <a:noFill/>
-          <a:ln/>
-        </p:spPr>
-        <p:txBody>
-          <a:bodyPr wrap="square" rtlCol="0" anchor="ctr"/>
-          <a:lstStyle/>
-          <a:p>
-            <a:pPr algn="ctr" indent="0" marL="0">
-              <a:buNone/>
-            </a:pPr>
-            <a:r>
-              <a:rPr lang="en-US" sz="900" b="1" dirty="0">
-                <a:solidFill>
-                  <a:srgbClr val="F59E0B"/>
+              <a:rPr lang="en-US" sz="950" b="1" dirty="0">
+                <a:solidFill>
+                  <a:srgbClr val="D97706"/>
                 </a:solidFill>
                 <a:latin typeface="Arial" pitchFamily="34" charset="0"/>
                 <a:ea typeface="Arial" pitchFamily="34" charset="-122"/>
@@ -7522,7 +7522,7 @@
               </a:rPr>
               <a:t>👑 Sesi Khusus Kepala Sekolah</a:t>
             </a:r>
-            <a:endParaRPr lang="en-US" sz="900" dirty="0"/>
+            <a:endParaRPr lang="en-US" sz="950" dirty="0"/>
           </a:p>
         </p:txBody>
       </p:sp>
@@ -7553,7 +7553,7 @@
             <a:r>
               <a:rPr lang="en-US" sz="2200" b="1" dirty="0">
                 <a:solidFill>
-                  <a:srgbClr val="FFFFFF"/>
+                  <a:srgbClr val="0F172A"/>
                 </a:solidFill>
                 <a:latin typeface="Arial" pitchFamily="34" charset="0"/>
                 <a:ea typeface="Arial" pitchFamily="34" charset="-122"/>
@@ -7582,7 +7582,7 @@
           <a:noFill/>
           <a:ln w="15240">
             <a:solidFill>
-              <a:srgbClr val="1E293B"/>
+              <a:srgbClr val="E2E8F0"/>
             </a:solidFill>
             <a:prstDash val="solid"/>
           </a:ln>
@@ -7654,7 +7654,7 @@
             <a:r>
               <a:rPr lang="en-US" sz="900" b="1" dirty="0">
                 <a:solidFill>
-                  <a:srgbClr val="94A3B8"/>
+                  <a:srgbClr val="0369A1"/>
                 </a:solidFill>
                 <a:latin typeface="Arial" pitchFamily="34" charset="0"/>
                 <a:ea typeface="Arial" pitchFamily="34" charset="-122"/>
@@ -7681,11 +7681,11 @@
             <a:avLst/>
           </a:prstGeom>
           <a:solidFill>
-            <a:srgbClr val="131E32"/>
+            <a:srgbClr val="FFFFFF"/>
           </a:solidFill>
           <a:ln w="15240">
             <a:solidFill>
-              <a:srgbClr val="1E293B"/>
+              <a:srgbClr val="CBD5E1"/>
             </a:solidFill>
             <a:prstDash val="solid"/>
           </a:ln>
@@ -7718,7 +7718,7 @@
             <a:r>
               <a:rPr lang="en-US" sz="1400" b="1" dirty="0">
                 <a:solidFill>
-                  <a:srgbClr val="38BDF8"/>
+                  <a:srgbClr val="0369A1"/>
                 </a:solidFill>
                 <a:latin typeface="Arial" pitchFamily="34" charset="0"/>
                 <a:ea typeface="Arial" pitchFamily="34" charset="-122"/>
@@ -7760,7 +7760,7 @@
             <a:r>
               <a:rPr lang="en-US" sz="1100" b="1" dirty="0">
                 <a:solidFill>
-                  <a:srgbClr val="FFFFFF"/>
+                  <a:srgbClr val="0F172A"/>
                 </a:solidFill>
                 <a:latin typeface="Arial" pitchFamily="34" charset="0"/>
                 <a:ea typeface="Arial" pitchFamily="34" charset="-122"/>
@@ -7778,7 +7778,7 @@
             <a:r>
               <a:rPr lang="en-US" sz="1000" dirty="0">
                 <a:solidFill>
-                  <a:srgbClr val="94A3B8"/>
+                  <a:srgbClr val="334155"/>
                 </a:solidFill>
                 <a:latin typeface="Arial" pitchFamily="34" charset="0"/>
                 <a:ea typeface="Arial" pitchFamily="34" charset="-122"/>
@@ -7796,7 +7796,7 @@
             <a:r>
               <a:rPr lang="en-US" sz="1100" b="1" dirty="0">
                 <a:solidFill>
-                  <a:srgbClr val="FFFFFF"/>
+                  <a:srgbClr val="0F172A"/>
                 </a:solidFill>
                 <a:latin typeface="Arial" pitchFamily="34" charset="0"/>
                 <a:ea typeface="Arial" pitchFamily="34" charset="-122"/>
@@ -7814,7 +7814,7 @@
             <a:r>
               <a:rPr lang="en-US" sz="1000" dirty="0">
                 <a:solidFill>
-                  <a:srgbClr val="94A3B8"/>
+                  <a:srgbClr val="334155"/>
                 </a:solidFill>
                 <a:latin typeface="Arial" pitchFamily="34" charset="0"/>
                 <a:ea typeface="Arial" pitchFamily="34" charset="-122"/>
@@ -7832,7 +7832,7 @@
             <a:r>
               <a:rPr lang="en-US" sz="1100" b="1" dirty="0">
                 <a:solidFill>
-                  <a:srgbClr val="FFFFFF"/>
+                  <a:srgbClr val="0F172A"/>
                 </a:solidFill>
                 <a:latin typeface="Arial" pitchFamily="34" charset="0"/>
                 <a:ea typeface="Arial" pitchFamily="34" charset="-122"/>
@@ -7850,7 +7850,7 @@
             <a:r>
               <a:rPr lang="en-US" sz="1000" dirty="0">
                 <a:solidFill>
-                  <a:srgbClr val="94A3B8"/>
+                  <a:srgbClr val="334155"/>
                 </a:solidFill>
                 <a:latin typeface="Arial" pitchFamily="34" charset="0"/>
                 <a:ea typeface="Arial" pitchFamily="34" charset="-122"/>
@@ -7868,7 +7868,7 @@
             <a:r>
               <a:rPr lang="en-US" sz="1100" b="1" dirty="0">
                 <a:solidFill>
-                  <a:srgbClr val="FFFFFF"/>
+                  <a:srgbClr val="0F172A"/>
                 </a:solidFill>
                 <a:latin typeface="Arial" pitchFamily="34" charset="0"/>
                 <a:ea typeface="Arial" pitchFamily="34" charset="-122"/>
@@ -7886,7 +7886,7 @@
             <a:r>
               <a:rPr lang="en-US" sz="1000" dirty="0">
                 <a:solidFill>
-                  <a:srgbClr val="94A3B8"/>
+                  <a:srgbClr val="334155"/>
                 </a:solidFill>
                 <a:latin typeface="Arial" pitchFamily="34" charset="0"/>
                 <a:ea typeface="Arial" pitchFamily="34" charset="-122"/>
@@ -7913,11 +7913,11 @@
             <a:avLst/>
           </a:prstGeom>
           <a:solidFill>
-            <a:srgbClr val="0F172A"/>
+            <a:srgbClr val="FFFFFF"/>
           </a:solidFill>
           <a:ln w="19050">
             <a:solidFill>
-              <a:srgbClr val="334155"/>
+              <a:srgbClr val="CBD5E1"/>
             </a:solidFill>
             <a:prstDash val="solid"/>
           </a:ln>
@@ -7932,17 +7932,17 @@
         <p:spPr>
           <a:xfrm>
             <a:off x="6217920" y="1600200"/>
-            <a:ext cx="5303520" cy="320040"/>
-          </a:xfrm>
-          <a:prstGeom prst="rect">
-            <a:avLst/>
-          </a:prstGeom>
-          <a:solidFill>
-            <a:srgbClr val="1E293B"/>
+            <a:ext cx="5303520" cy="347472"/>
+          </a:xfrm>
+          <a:prstGeom prst="rect">
+            <a:avLst/>
+          </a:prstGeom>
+          <a:solidFill>
+            <a:srgbClr val="F1F5F9"/>
           </a:solidFill>
           <a:ln w="12700">
             <a:solidFill>
-              <a:srgbClr val="1E293B"/>
+              <a:srgbClr val="E2E8F0"/>
             </a:solidFill>
             <a:prstDash val="solid"/>
           </a:ln>
@@ -7956,7 +7956,7 @@
         </p:nvSpPr>
         <p:spPr>
           <a:xfrm>
-            <a:off x="6355080" y="1700784"/>
+            <a:off x="6355080" y="1709928"/>
             <a:ext cx="118872" cy="118872"/>
           </a:xfrm>
           <a:prstGeom prst="ellipse">
@@ -7981,7 +7981,7 @@
         </p:nvSpPr>
         <p:spPr>
           <a:xfrm>
-            <a:off x="6537960" y="1700784"/>
+            <a:off x="6537960" y="1709928"/>
             <a:ext cx="118872" cy="118872"/>
           </a:xfrm>
           <a:prstGeom prst="ellipse">
@@ -8006,7 +8006,7 @@
         </p:nvSpPr>
         <p:spPr>
           <a:xfrm>
-            <a:off x="6720840" y="1700784"/>
+            <a:off x="6720840" y="1709928"/>
             <a:ext cx="118872" cy="118872"/>
           </a:xfrm>
           <a:prstGeom prst="ellipse">
@@ -8032,17 +8032,17 @@
         <p:spPr>
           <a:xfrm>
             <a:off x="6995160" y="1664208"/>
-            <a:ext cx="4389120" cy="201168"/>
+            <a:ext cx="4389120" cy="219456"/>
           </a:xfrm>
           <a:prstGeom prst="roundRect">
             <a:avLst/>
           </a:prstGeom>
           <a:solidFill>
-            <a:srgbClr val="0F172A"/>
+            <a:srgbClr val="FFFFFF"/>
           </a:solidFill>
           <a:ln w="10160">
             <a:solidFill>
-              <a:srgbClr val="334155"/>
+              <a:srgbClr val="CBD5E1"/>
             </a:solidFill>
             <a:prstDash val="solid"/>
           </a:ln>
@@ -8057,7 +8057,7 @@
         <p:spPr>
           <a:xfrm>
             <a:off x="7086600" y="1664208"/>
-            <a:ext cx="4206240" cy="201168"/>
+            <a:ext cx="4206240" cy="219456"/>
           </a:xfrm>
           <a:prstGeom prst="rect">
             <a:avLst/>
@@ -8073,7 +8073,7 @@
               <a:buNone/>
             </a:pPr>
             <a:r>
-              <a:rPr lang="en-US" sz="750" dirty="0">
+              <a:rPr lang="en-US" sz="800" dirty="0">
                 <a:solidFill>
                   <a:srgbClr val="64748B"/>
                 </a:solidFill>
@@ -8081,9 +8081,9 @@
                 <a:ea typeface="Arial" pitchFamily="34" charset="-122"/>
                 <a:cs typeface="Arial" pitchFamily="34" charset="-120"/>
               </a:rPr>
-              <a:t>https://belajarplus.id/admin</a:t>
-            </a:r>
-            <a:endParaRPr lang="en-US" sz="750" dirty="0"/>
+              <a:t>🔒 https://belajarplus.id/admin</a:t>
+            </a:r>
+            <a:endParaRPr lang="en-US" sz="800" dirty="0"/>
           </a:p>
         </p:txBody>
       </p:sp>
@@ -8102,8 +8102,8 @@
         </p:blipFill>
         <p:spPr>
           <a:xfrm>
-            <a:off x="6263640" y="1938528"/>
-            <a:ext cx="5212080" cy="4187952"/>
+            <a:off x="6263640" y="1965960"/>
+            <a:ext cx="5212080" cy="4160520"/>
           </a:xfrm>
           <a:prstGeom prst="rect">
             <a:avLst/>
@@ -8124,7 +8124,7 @@
     <p:bg>
       <p:bgPr>
         <a:solidFill>
-          <a:srgbClr val="0A0F1D"/>
+          <a:srgbClr val="F8FAFC"/>
         </a:solidFill>
       </p:bgPr>
     </p:bg>
@@ -8157,11 +8157,11 @@
             <a:avLst/>
           </a:prstGeom>
           <a:solidFill>
-            <a:srgbClr val="2563EB"/>
+            <a:srgbClr val="0284C7"/>
           </a:solidFill>
           <a:ln w="12700">
             <a:solidFill>
-              <a:srgbClr val="2563EB"/>
+              <a:srgbClr val="0284C7"/>
             </a:solidFill>
             <a:prstDash val="solid"/>
           </a:ln>
@@ -8183,8 +8183,8 @@
         </p:blipFill>
         <p:spPr>
           <a:xfrm>
-            <a:off x="640080" y="228600"/>
-            <a:ext cx="1828800" cy="457200"/>
+            <a:off x="640080" y="201168"/>
+            <a:ext cx="1920240" cy="475488"/>
           </a:xfrm>
           <a:prstGeom prst="rect">
             <a:avLst/>
@@ -8199,32 +8199,96 @@
         </p:nvSpPr>
         <p:spPr>
           <a:xfrm>
-            <a:off x="2743200" y="274320"/>
+            <a:off x="2834640" y="256032"/>
+            <a:ext cx="3017520" cy="347472"/>
+          </a:xfrm>
+          <a:prstGeom prst="roundRect">
+            <a:avLst/>
+          </a:prstGeom>
+          <a:solidFill>
+            <a:srgbClr val="E0F2FE"/>
+          </a:solidFill>
+          <a:ln w="15240">
+            <a:solidFill>
+              <a:srgbClr val="BAE6FD"/>
+            </a:solidFill>
+            <a:prstDash val="solid"/>
+          </a:ln>
+        </p:spPr>
+      </p:sp>
+      <p:sp>
+        <p:nvSpPr>
+          <p:cNvPr id="5" name="Text 2"/>
+          <p:cNvSpPr/>
+          <p:nvPr/>
+        </p:nvSpPr>
+        <p:spPr>
+          <a:xfrm>
+            <a:off x="2834640" y="256032"/>
+            <a:ext cx="3017520" cy="347472"/>
+          </a:xfrm>
+          <a:prstGeom prst="rect">
+            <a:avLst/>
+          </a:prstGeom>
+          <a:noFill/>
+          <a:ln/>
+        </p:spPr>
+        <p:txBody>
+          <a:bodyPr wrap="square" rtlCol="0" anchor="ctr"/>
+          <a:lstStyle/>
+          <a:p>
+            <a:pPr algn="ctr" indent="0" marL="0">
+              <a:buNone/>
+            </a:pPr>
+            <a:r>
+              <a:rPr lang="en-US" sz="950" b="1" dirty="0">
+                <a:solidFill>
+                  <a:srgbClr val="0369A1"/>
+                </a:solidFill>
+                <a:latin typeface="Arial" pitchFamily="34" charset="0"/>
+                <a:ea typeface="Arial" pitchFamily="34" charset="-122"/>
+                <a:cs typeface="Arial" pitchFamily="34" charset="-120"/>
+              </a:rPr>
+              <a:t>INVENTARIS PERPUSTAKAAN</a:t>
+            </a:r>
+            <a:endParaRPr lang="en-US" sz="950" dirty="0"/>
+          </a:p>
+        </p:txBody>
+      </p:sp>
+      <p:sp>
+        <p:nvSpPr>
+          <p:cNvPr id="6" name="Shape 3"/>
+          <p:cNvSpPr/>
+          <p:nvPr/>
+        </p:nvSpPr>
+        <p:spPr>
+          <a:xfrm>
+            <a:off x="8595360" y="256032"/>
             <a:ext cx="2926080" cy="347472"/>
           </a:xfrm>
           <a:prstGeom prst="roundRect">
             <a:avLst/>
           </a:prstGeom>
           <a:solidFill>
-            <a:srgbClr val="0F172A"/>
+            <a:srgbClr val="FEF3C7"/>
           </a:solidFill>
           <a:ln w="15240">
             <a:solidFill>
-              <a:srgbClr val="2563EB"/>
-            </a:solidFill>
-            <a:prstDash val="solid"/>
-          </a:ln>
-        </p:spPr>
-      </p:sp>
-      <p:sp>
-        <p:nvSpPr>
-          <p:cNvPr id="5" name="Text 2"/>
-          <p:cNvSpPr/>
-          <p:nvPr/>
-        </p:nvSpPr>
-        <p:spPr>
-          <a:xfrm>
-            <a:off x="2743200" y="274320"/>
+              <a:srgbClr val="FCD34D"/>
+            </a:solidFill>
+            <a:prstDash val="solid"/>
+          </a:ln>
+        </p:spPr>
+      </p:sp>
+      <p:sp>
+        <p:nvSpPr>
+          <p:cNvPr id="7" name="Text 4"/>
+          <p:cNvSpPr/>
+          <p:nvPr/>
+        </p:nvSpPr>
+        <p:spPr>
+          <a:xfrm>
+            <a:off x="8595360" y="256032"/>
             <a:ext cx="2926080" cy="347472"/>
           </a:xfrm>
           <a:prstGeom prst="rect">
@@ -8241,73 +8305,9 @@
               <a:buNone/>
             </a:pPr>
             <a:r>
-              <a:rPr lang="en-US" sz="900" b="1" dirty="0">
-                <a:solidFill>
-                  <a:srgbClr val="38BDF8"/>
-                </a:solidFill>
-                <a:latin typeface="Arial" pitchFamily="34" charset="0"/>
-                <a:ea typeface="Arial" pitchFamily="34" charset="-122"/>
-                <a:cs typeface="Arial" pitchFamily="34" charset="-120"/>
-              </a:rPr>
-              <a:t>INVENTARIS PERPUSTAKAAN</a:t>
-            </a:r>
-            <a:endParaRPr lang="en-US" sz="900" dirty="0"/>
-          </a:p>
-        </p:txBody>
-      </p:sp>
-      <p:sp>
-        <p:nvSpPr>
-          <p:cNvPr id="6" name="Shape 3"/>
-          <p:cNvSpPr/>
-          <p:nvPr/>
-        </p:nvSpPr>
-        <p:spPr>
-          <a:xfrm>
-            <a:off x="8778240" y="274320"/>
-            <a:ext cx="2743200" cy="347472"/>
-          </a:xfrm>
-          <a:prstGeom prst="roundRect">
-            <a:avLst/>
-          </a:prstGeom>
-          <a:solidFill>
-            <a:srgbClr val="1C1917"/>
-          </a:solidFill>
-          <a:ln w="15240">
-            <a:solidFill>
-              <a:srgbClr val="F59E0B"/>
-            </a:solidFill>
-            <a:prstDash val="solid"/>
-          </a:ln>
-        </p:spPr>
-      </p:sp>
-      <p:sp>
-        <p:nvSpPr>
-          <p:cNvPr id="7" name="Text 4"/>
-          <p:cNvSpPr/>
-          <p:nvPr/>
-        </p:nvSpPr>
-        <p:spPr>
-          <a:xfrm>
-            <a:off x="8778240" y="274320"/>
-            <a:ext cx="2743200" cy="347472"/>
-          </a:xfrm>
-          <a:prstGeom prst="rect">
-            <a:avLst/>
-          </a:prstGeom>
-          <a:noFill/>
-          <a:ln/>
-        </p:spPr>
-        <p:txBody>
-          <a:bodyPr wrap="square" rtlCol="0" anchor="ctr"/>
-          <a:lstStyle/>
-          <a:p>
-            <a:pPr algn="ctr" indent="0" marL="0">
-              <a:buNone/>
-            </a:pPr>
-            <a:r>
-              <a:rPr lang="en-US" sz="900" b="1" dirty="0">
-                <a:solidFill>
-                  <a:srgbClr val="F59E0B"/>
+              <a:rPr lang="en-US" sz="950" b="1" dirty="0">
+                <a:solidFill>
+                  <a:srgbClr val="D97706"/>
                 </a:solidFill>
                 <a:latin typeface="Arial" pitchFamily="34" charset="0"/>
                 <a:ea typeface="Arial" pitchFamily="34" charset="-122"/>
@@ -8315,7 +8315,7 @@
               </a:rPr>
               <a:t>👑 Sesi Khusus Kepala Sekolah</a:t>
             </a:r>
-            <a:endParaRPr lang="en-US" sz="900" dirty="0"/>
+            <a:endParaRPr lang="en-US" sz="950" dirty="0"/>
           </a:p>
         </p:txBody>
       </p:sp>
@@ -8346,7 +8346,7 @@
             <a:r>
               <a:rPr lang="en-US" sz="2200" b="1" dirty="0">
                 <a:solidFill>
-                  <a:srgbClr val="FFFFFF"/>
+                  <a:srgbClr val="0F172A"/>
                 </a:solidFill>
                 <a:latin typeface="Arial" pitchFamily="34" charset="0"/>
                 <a:ea typeface="Arial" pitchFamily="34" charset="-122"/>
@@ -8375,7 +8375,7 @@
           <a:noFill/>
           <a:ln w="15240">
             <a:solidFill>
-              <a:srgbClr val="1E293B"/>
+              <a:srgbClr val="E2E8F0"/>
             </a:solidFill>
             <a:prstDash val="solid"/>
           </a:ln>
@@ -8447,7 +8447,7 @@
             <a:r>
               <a:rPr lang="en-US" sz="900" b="1" dirty="0">
                 <a:solidFill>
-                  <a:srgbClr val="94A3B8"/>
+                  <a:srgbClr val="0369A1"/>
                 </a:solidFill>
                 <a:latin typeface="Arial" pitchFamily="34" charset="0"/>
                 <a:ea typeface="Arial" pitchFamily="34" charset="-122"/>
@@ -8474,11 +8474,11 @@
             <a:avLst/>
           </a:prstGeom>
           <a:solidFill>
-            <a:srgbClr val="131E32"/>
+            <a:srgbClr val="FFFFFF"/>
           </a:solidFill>
           <a:ln w="15240">
             <a:solidFill>
-              <a:srgbClr val="1E293B"/>
+              <a:srgbClr val="CBD5E1"/>
             </a:solidFill>
             <a:prstDash val="solid"/>
           </a:ln>
@@ -8511,7 +8511,7 @@
             <a:r>
               <a:rPr lang="en-US" sz="1400" b="1" dirty="0">
                 <a:solidFill>
-                  <a:srgbClr val="38BDF8"/>
+                  <a:srgbClr val="0369A1"/>
                 </a:solidFill>
                 <a:latin typeface="Arial" pitchFamily="34" charset="0"/>
                 <a:ea typeface="Arial" pitchFamily="34" charset="-122"/>
@@ -8553,7 +8553,7 @@
             <a:r>
               <a:rPr lang="en-US" sz="1100" b="1" dirty="0">
                 <a:solidFill>
-                  <a:srgbClr val="FFFFFF"/>
+                  <a:srgbClr val="0F172A"/>
                 </a:solidFill>
                 <a:latin typeface="Arial" pitchFamily="34" charset="0"/>
                 <a:ea typeface="Arial" pitchFamily="34" charset="-122"/>
@@ -8571,7 +8571,7 @@
             <a:r>
               <a:rPr lang="en-US" sz="1000" dirty="0">
                 <a:solidFill>
-                  <a:srgbClr val="94A3B8"/>
+                  <a:srgbClr val="334155"/>
                 </a:solidFill>
                 <a:latin typeface="Arial" pitchFamily="34" charset="0"/>
                 <a:ea typeface="Arial" pitchFamily="34" charset="-122"/>
@@ -8589,7 +8589,7 @@
             <a:r>
               <a:rPr lang="en-US" sz="1100" b="1" dirty="0">
                 <a:solidFill>
-                  <a:srgbClr val="FFFFFF"/>
+                  <a:srgbClr val="0F172A"/>
                 </a:solidFill>
                 <a:latin typeface="Arial" pitchFamily="34" charset="0"/>
                 <a:ea typeface="Arial" pitchFamily="34" charset="-122"/>
@@ -8607,7 +8607,7 @@
             <a:r>
               <a:rPr lang="en-US" sz="1000" dirty="0">
                 <a:solidFill>
-                  <a:srgbClr val="94A3B8"/>
+                  <a:srgbClr val="334155"/>
                 </a:solidFill>
                 <a:latin typeface="Arial" pitchFamily="34" charset="0"/>
                 <a:ea typeface="Arial" pitchFamily="34" charset="-122"/>
@@ -8625,7 +8625,7 @@
             <a:r>
               <a:rPr lang="en-US" sz="1100" b="1" dirty="0">
                 <a:solidFill>
-                  <a:srgbClr val="FFFFFF"/>
+                  <a:srgbClr val="0F172A"/>
                 </a:solidFill>
                 <a:latin typeface="Arial" pitchFamily="34" charset="0"/>
                 <a:ea typeface="Arial" pitchFamily="34" charset="-122"/>
@@ -8643,7 +8643,7 @@
             <a:r>
               <a:rPr lang="en-US" sz="1000" dirty="0">
                 <a:solidFill>
-                  <a:srgbClr val="94A3B8"/>
+                  <a:srgbClr val="334155"/>
                 </a:solidFill>
                 <a:latin typeface="Arial" pitchFamily="34" charset="0"/>
                 <a:ea typeface="Arial" pitchFamily="34" charset="-122"/>
@@ -8661,7 +8661,7 @@
             <a:r>
               <a:rPr lang="en-US" sz="1100" b="1" dirty="0">
                 <a:solidFill>
-                  <a:srgbClr val="FFFFFF"/>
+                  <a:srgbClr val="0F172A"/>
                 </a:solidFill>
                 <a:latin typeface="Arial" pitchFamily="34" charset="0"/>
                 <a:ea typeface="Arial" pitchFamily="34" charset="-122"/>
@@ -8679,7 +8679,7 @@
             <a:r>
               <a:rPr lang="en-US" sz="1000" dirty="0">
                 <a:solidFill>
-                  <a:srgbClr val="94A3B8"/>
+                  <a:srgbClr val="334155"/>
                 </a:solidFill>
                 <a:latin typeface="Arial" pitchFamily="34" charset="0"/>
                 <a:ea typeface="Arial" pitchFamily="34" charset="-122"/>
@@ -8706,11 +8706,11 @@
             <a:avLst/>
           </a:prstGeom>
           <a:solidFill>
-            <a:srgbClr val="0F172A"/>
+            <a:srgbClr val="FFFFFF"/>
           </a:solidFill>
           <a:ln w="19050">
             <a:solidFill>
-              <a:srgbClr val="334155"/>
+              <a:srgbClr val="CBD5E1"/>
             </a:solidFill>
             <a:prstDash val="solid"/>
           </a:ln>
@@ -8725,17 +8725,17 @@
         <p:spPr>
           <a:xfrm>
             <a:off x="6217920" y="1600200"/>
-            <a:ext cx="5303520" cy="320040"/>
-          </a:xfrm>
-          <a:prstGeom prst="rect">
-            <a:avLst/>
-          </a:prstGeom>
-          <a:solidFill>
-            <a:srgbClr val="1E293B"/>
+            <a:ext cx="5303520" cy="347472"/>
+          </a:xfrm>
+          <a:prstGeom prst="rect">
+            <a:avLst/>
+          </a:prstGeom>
+          <a:solidFill>
+            <a:srgbClr val="F1F5F9"/>
           </a:solidFill>
           <a:ln w="12700">
             <a:solidFill>
-              <a:srgbClr val="1E293B"/>
+              <a:srgbClr val="E2E8F0"/>
             </a:solidFill>
             <a:prstDash val="solid"/>
           </a:ln>
@@ -8749,7 +8749,7 @@
         </p:nvSpPr>
         <p:spPr>
           <a:xfrm>
-            <a:off x="6355080" y="1700784"/>
+            <a:off x="6355080" y="1709928"/>
             <a:ext cx="118872" cy="118872"/>
           </a:xfrm>
           <a:prstGeom prst="ellipse">
@@ -8774,7 +8774,7 @@
         </p:nvSpPr>
         <p:spPr>
           <a:xfrm>
-            <a:off x="6537960" y="1700784"/>
+            <a:off x="6537960" y="1709928"/>
             <a:ext cx="118872" cy="118872"/>
           </a:xfrm>
           <a:prstGeom prst="ellipse">
@@ -8799,7 +8799,7 @@
         </p:nvSpPr>
         <p:spPr>
           <a:xfrm>
-            <a:off x="6720840" y="1700784"/>
+            <a:off x="6720840" y="1709928"/>
             <a:ext cx="118872" cy="118872"/>
           </a:xfrm>
           <a:prstGeom prst="ellipse">
@@ -8825,17 +8825,17 @@
         <p:spPr>
           <a:xfrm>
             <a:off x="6995160" y="1664208"/>
-            <a:ext cx="4389120" cy="201168"/>
+            <a:ext cx="4389120" cy="219456"/>
           </a:xfrm>
           <a:prstGeom prst="roundRect">
             <a:avLst/>
           </a:prstGeom>
           <a:solidFill>
-            <a:srgbClr val="0F172A"/>
+            <a:srgbClr val="FFFFFF"/>
           </a:solidFill>
           <a:ln w="10160">
             <a:solidFill>
-              <a:srgbClr val="334155"/>
+              <a:srgbClr val="CBD5E1"/>
             </a:solidFill>
             <a:prstDash val="solid"/>
           </a:ln>
@@ -8850,7 +8850,7 @@
         <p:spPr>
           <a:xfrm>
             <a:off x="7086600" y="1664208"/>
-            <a:ext cx="4206240" cy="201168"/>
+            <a:ext cx="4206240" cy="219456"/>
           </a:xfrm>
           <a:prstGeom prst="rect">
             <a:avLst/>
@@ -8866,7 +8866,7 @@
               <a:buNone/>
             </a:pPr>
             <a:r>
-              <a:rPr lang="en-US" sz="750" dirty="0">
+              <a:rPr lang="en-US" sz="800" dirty="0">
                 <a:solidFill>
                   <a:srgbClr val="64748B"/>
                 </a:solidFill>
@@ -8874,9 +8874,9 @@
                 <a:ea typeface="Arial" pitchFamily="34" charset="-122"/>
                 <a:cs typeface="Arial" pitchFamily="34" charset="-120"/>
               </a:rPr>
-              <a:t>https://belajarplus.id/admin</a:t>
-            </a:r>
-            <a:endParaRPr lang="en-US" sz="750" dirty="0"/>
+              <a:t>🔒 https://belajarplus.id/admin</a:t>
+            </a:r>
+            <a:endParaRPr lang="en-US" sz="800" dirty="0"/>
           </a:p>
         </p:txBody>
       </p:sp>
@@ -8895,8 +8895,8 @@
         </p:blipFill>
         <p:spPr>
           <a:xfrm>
-            <a:off x="6263640" y="1938528"/>
-            <a:ext cx="5212080" cy="4187952"/>
+            <a:off x="6263640" y="1965960"/>
+            <a:ext cx="5212080" cy="4160520"/>
           </a:xfrm>
           <a:prstGeom prst="rect">
             <a:avLst/>
@@ -8917,7 +8917,7 @@
     <p:bg>
       <p:bgPr>
         <a:solidFill>
-          <a:srgbClr val="0A0F1D"/>
+          <a:srgbClr val="F8FAFC"/>
         </a:solidFill>
       </p:bgPr>
     </p:bg>
@@ -8950,11 +8950,11 @@
             <a:avLst/>
           </a:prstGeom>
           <a:solidFill>
-            <a:srgbClr val="2563EB"/>
+            <a:srgbClr val="0284C7"/>
           </a:solidFill>
           <a:ln w="12700">
             <a:solidFill>
-              <a:srgbClr val="2563EB"/>
+              <a:srgbClr val="0284C7"/>
             </a:solidFill>
             <a:prstDash val="solid"/>
           </a:ln>
@@ -8976,8 +8976,8 @@
         </p:blipFill>
         <p:spPr>
           <a:xfrm>
-            <a:off x="640080" y="228600"/>
-            <a:ext cx="1828800" cy="457200"/>
+            <a:off x="640080" y="201168"/>
+            <a:ext cx="1920240" cy="475488"/>
           </a:xfrm>
           <a:prstGeom prst="rect">
             <a:avLst/>
@@ -8992,32 +8992,96 @@
         </p:nvSpPr>
         <p:spPr>
           <a:xfrm>
-            <a:off x="2743200" y="274320"/>
+            <a:off x="2834640" y="256032"/>
+            <a:ext cx="3017520" cy="347472"/>
+          </a:xfrm>
+          <a:prstGeom prst="roundRect">
+            <a:avLst/>
+          </a:prstGeom>
+          <a:solidFill>
+            <a:srgbClr val="E0F2FE"/>
+          </a:solidFill>
+          <a:ln w="15240">
+            <a:solidFill>
+              <a:srgbClr val="BAE6FD"/>
+            </a:solidFill>
+            <a:prstDash val="solid"/>
+          </a:ln>
+        </p:spPr>
+      </p:sp>
+      <p:sp>
+        <p:nvSpPr>
+          <p:cNvPr id="5" name="Text 2"/>
+          <p:cNvSpPr/>
+          <p:nvPr/>
+        </p:nvSpPr>
+        <p:spPr>
+          <a:xfrm>
+            <a:off x="2834640" y="256032"/>
+            <a:ext cx="3017520" cy="347472"/>
+          </a:xfrm>
+          <a:prstGeom prst="rect">
+            <a:avLst/>
+          </a:prstGeom>
+          <a:noFill/>
+          <a:ln/>
+        </p:spPr>
+        <p:txBody>
+          <a:bodyPr wrap="square" rtlCol="0" anchor="ctr"/>
+          <a:lstStyle/>
+          <a:p>
+            <a:pPr algn="ctr" indent="0" marL="0">
+              <a:buNone/>
+            </a:pPr>
+            <a:r>
+              <a:rPr lang="en-US" sz="950" b="1" dirty="0">
+                <a:solidFill>
+                  <a:srgbClr val="0369A1"/>
+                </a:solidFill>
+                <a:latin typeface="Arial" pitchFamily="34" charset="0"/>
+                <a:ea typeface="Arial" pitchFamily="34" charset="-122"/>
+                <a:cs typeface="Arial" pitchFamily="34" charset="-120"/>
+              </a:rPr>
+              <a:t>MANAJEMEN PENGGUNA</a:t>
+            </a:r>
+            <a:endParaRPr lang="en-US" sz="950" dirty="0"/>
+          </a:p>
+        </p:txBody>
+      </p:sp>
+      <p:sp>
+        <p:nvSpPr>
+          <p:cNvPr id="6" name="Shape 3"/>
+          <p:cNvSpPr/>
+          <p:nvPr/>
+        </p:nvSpPr>
+        <p:spPr>
+          <a:xfrm>
+            <a:off x="8595360" y="256032"/>
             <a:ext cx="2926080" cy="347472"/>
           </a:xfrm>
           <a:prstGeom prst="roundRect">
             <a:avLst/>
           </a:prstGeom>
           <a:solidFill>
-            <a:srgbClr val="0F172A"/>
+            <a:srgbClr val="FEF3C7"/>
           </a:solidFill>
           <a:ln w="15240">
             <a:solidFill>
-              <a:srgbClr val="2563EB"/>
-            </a:solidFill>
-            <a:prstDash val="solid"/>
-          </a:ln>
-        </p:spPr>
-      </p:sp>
-      <p:sp>
-        <p:nvSpPr>
-          <p:cNvPr id="5" name="Text 2"/>
-          <p:cNvSpPr/>
-          <p:nvPr/>
-        </p:nvSpPr>
-        <p:spPr>
-          <a:xfrm>
-            <a:off x="2743200" y="274320"/>
+              <a:srgbClr val="FCD34D"/>
+            </a:solidFill>
+            <a:prstDash val="solid"/>
+          </a:ln>
+        </p:spPr>
+      </p:sp>
+      <p:sp>
+        <p:nvSpPr>
+          <p:cNvPr id="7" name="Text 4"/>
+          <p:cNvSpPr/>
+          <p:nvPr/>
+        </p:nvSpPr>
+        <p:spPr>
+          <a:xfrm>
+            <a:off x="8595360" y="256032"/>
             <a:ext cx="2926080" cy="347472"/>
           </a:xfrm>
           <a:prstGeom prst="rect">
@@ -9034,73 +9098,9 @@
               <a:buNone/>
             </a:pPr>
             <a:r>
-              <a:rPr lang="en-US" sz="900" b="1" dirty="0">
-                <a:solidFill>
-                  <a:srgbClr val="38BDF8"/>
-                </a:solidFill>
-                <a:latin typeface="Arial" pitchFamily="34" charset="0"/>
-                <a:ea typeface="Arial" pitchFamily="34" charset="-122"/>
-                <a:cs typeface="Arial" pitchFamily="34" charset="-120"/>
-              </a:rPr>
-              <a:t>MANAJEMEN PENGGUNA</a:t>
-            </a:r>
-            <a:endParaRPr lang="en-US" sz="900" dirty="0"/>
-          </a:p>
-        </p:txBody>
-      </p:sp>
-      <p:sp>
-        <p:nvSpPr>
-          <p:cNvPr id="6" name="Shape 3"/>
-          <p:cNvSpPr/>
-          <p:nvPr/>
-        </p:nvSpPr>
-        <p:spPr>
-          <a:xfrm>
-            <a:off x="8778240" y="274320"/>
-            <a:ext cx="2743200" cy="347472"/>
-          </a:xfrm>
-          <a:prstGeom prst="roundRect">
-            <a:avLst/>
-          </a:prstGeom>
-          <a:solidFill>
-            <a:srgbClr val="1C1917"/>
-          </a:solidFill>
-          <a:ln w="15240">
-            <a:solidFill>
-              <a:srgbClr val="F59E0B"/>
-            </a:solidFill>
-            <a:prstDash val="solid"/>
-          </a:ln>
-        </p:spPr>
-      </p:sp>
-      <p:sp>
-        <p:nvSpPr>
-          <p:cNvPr id="7" name="Text 4"/>
-          <p:cNvSpPr/>
-          <p:nvPr/>
-        </p:nvSpPr>
-        <p:spPr>
-          <a:xfrm>
-            <a:off x="8778240" y="274320"/>
-            <a:ext cx="2743200" cy="347472"/>
-          </a:xfrm>
-          <a:prstGeom prst="rect">
-            <a:avLst/>
-          </a:prstGeom>
-          <a:noFill/>
-          <a:ln/>
-        </p:spPr>
-        <p:txBody>
-          <a:bodyPr wrap="square" rtlCol="0" anchor="ctr"/>
-          <a:lstStyle/>
-          <a:p>
-            <a:pPr algn="ctr" indent="0" marL="0">
-              <a:buNone/>
-            </a:pPr>
-            <a:r>
-              <a:rPr lang="en-US" sz="900" b="1" dirty="0">
-                <a:solidFill>
-                  <a:srgbClr val="F59E0B"/>
+              <a:rPr lang="en-US" sz="950" b="1" dirty="0">
+                <a:solidFill>
+                  <a:srgbClr val="D97706"/>
                 </a:solidFill>
                 <a:latin typeface="Arial" pitchFamily="34" charset="0"/>
                 <a:ea typeface="Arial" pitchFamily="34" charset="-122"/>
@@ -9108,7 +9108,7 @@
               </a:rPr>
               <a:t>👑 Sesi Khusus Kepala Sekolah</a:t>
             </a:r>
-            <a:endParaRPr lang="en-US" sz="900" dirty="0"/>
+            <a:endParaRPr lang="en-US" sz="950" dirty="0"/>
           </a:p>
         </p:txBody>
       </p:sp>
@@ -9139,7 +9139,7 @@
             <a:r>
               <a:rPr lang="en-US" sz="2200" b="1" dirty="0">
                 <a:solidFill>
-                  <a:srgbClr val="FFFFFF"/>
+                  <a:srgbClr val="0F172A"/>
                 </a:solidFill>
                 <a:latin typeface="Arial" pitchFamily="34" charset="0"/>
                 <a:ea typeface="Arial" pitchFamily="34" charset="-122"/>
@@ -9168,7 +9168,7 @@
           <a:noFill/>
           <a:ln w="15240">
             <a:solidFill>
-              <a:srgbClr val="1E293B"/>
+              <a:srgbClr val="E2E8F0"/>
             </a:solidFill>
             <a:prstDash val="solid"/>
           </a:ln>
@@ -9240,7 +9240,7 @@
             <a:r>
               <a:rPr lang="en-US" sz="900" b="1" dirty="0">
                 <a:solidFill>
-                  <a:srgbClr val="94A3B8"/>
+                  <a:srgbClr val="0369A1"/>
                 </a:solidFill>
                 <a:latin typeface="Arial" pitchFamily="34" charset="0"/>
                 <a:ea typeface="Arial" pitchFamily="34" charset="-122"/>
@@ -9267,11 +9267,11 @@
             <a:avLst/>
           </a:prstGeom>
           <a:solidFill>
-            <a:srgbClr val="131E32"/>
+            <a:srgbClr val="FFFFFF"/>
           </a:solidFill>
           <a:ln w="15240">
             <a:solidFill>
-              <a:srgbClr val="1E293B"/>
+              <a:srgbClr val="CBD5E1"/>
             </a:solidFill>
             <a:prstDash val="solid"/>
           </a:ln>
@@ -9304,7 +9304,7 @@
             <a:r>
               <a:rPr lang="en-US" sz="1400" b="1" dirty="0">
                 <a:solidFill>
-                  <a:srgbClr val="38BDF8"/>
+                  <a:srgbClr val="0369A1"/>
                 </a:solidFill>
                 <a:latin typeface="Arial" pitchFamily="34" charset="0"/>
                 <a:ea typeface="Arial" pitchFamily="34" charset="-122"/>
@@ -9346,7 +9346,7 @@
             <a:r>
               <a:rPr lang="en-US" sz="1100" b="1" dirty="0">
                 <a:solidFill>
-                  <a:srgbClr val="FFFFFF"/>
+                  <a:srgbClr val="0F172A"/>
                 </a:solidFill>
                 <a:latin typeface="Arial" pitchFamily="34" charset="0"/>
                 <a:ea typeface="Arial" pitchFamily="34" charset="-122"/>
@@ -9364,7 +9364,7 @@
             <a:r>
               <a:rPr lang="en-US" sz="1000" dirty="0">
                 <a:solidFill>
-                  <a:srgbClr val="94A3B8"/>
+                  <a:srgbClr val="334155"/>
                 </a:solidFill>
                 <a:latin typeface="Arial" pitchFamily="34" charset="0"/>
                 <a:ea typeface="Arial" pitchFamily="34" charset="-122"/>
@@ -9384,7 +9384,7 @@
             <a:r>
               <a:rPr lang="en-US" sz="1100" b="1" dirty="0">
                 <a:solidFill>
-                  <a:srgbClr val="FFFFFF"/>
+                  <a:srgbClr val="0F172A"/>
                 </a:solidFill>
                 <a:latin typeface="Arial" pitchFamily="34" charset="0"/>
                 <a:ea typeface="Arial" pitchFamily="34" charset="-122"/>
@@ -9402,7 +9402,7 @@
             <a:r>
               <a:rPr lang="en-US" sz="1000" dirty="0">
                 <a:solidFill>
-                  <a:srgbClr val="94A3B8"/>
+                  <a:srgbClr val="334155"/>
                 </a:solidFill>
                 <a:latin typeface="Arial" pitchFamily="34" charset="0"/>
                 <a:ea typeface="Arial" pitchFamily="34" charset="-122"/>
@@ -9422,7 +9422,7 @@
             <a:r>
               <a:rPr lang="en-US" sz="1000" dirty="0">
                 <a:solidFill>
-                  <a:srgbClr val="94A3B8"/>
+                  <a:srgbClr val="334155"/>
                 </a:solidFill>
                 <a:latin typeface="Arial" pitchFamily="34" charset="0"/>
                 <a:ea typeface="Arial" pitchFamily="34" charset="-122"/>
@@ -9442,7 +9442,7 @@
             <a:r>
               <a:rPr lang="en-US" sz="1000" dirty="0">
                 <a:solidFill>
-                  <a:srgbClr val="94A3B8"/>
+                  <a:srgbClr val="334155"/>
                 </a:solidFill>
                 <a:latin typeface="Arial" pitchFamily="34" charset="0"/>
                 <a:ea typeface="Arial" pitchFamily="34" charset="-122"/>
@@ -9469,11 +9469,11 @@
             <a:avLst/>
           </a:prstGeom>
           <a:solidFill>
-            <a:srgbClr val="0F172A"/>
+            <a:srgbClr val="FFFFFF"/>
           </a:solidFill>
           <a:ln w="19050">
             <a:solidFill>
-              <a:srgbClr val="334155"/>
+              <a:srgbClr val="CBD5E1"/>
             </a:solidFill>
             <a:prstDash val="solid"/>
           </a:ln>
@@ -9488,17 +9488,17 @@
         <p:spPr>
           <a:xfrm>
             <a:off x="6217920" y="1600200"/>
-            <a:ext cx="5303520" cy="320040"/>
-          </a:xfrm>
-          <a:prstGeom prst="rect">
-            <a:avLst/>
-          </a:prstGeom>
-          <a:solidFill>
-            <a:srgbClr val="1E293B"/>
+            <a:ext cx="5303520" cy="347472"/>
+          </a:xfrm>
+          <a:prstGeom prst="rect">
+            <a:avLst/>
+          </a:prstGeom>
+          <a:solidFill>
+            <a:srgbClr val="F1F5F9"/>
           </a:solidFill>
           <a:ln w="12700">
             <a:solidFill>
-              <a:srgbClr val="1E293B"/>
+              <a:srgbClr val="E2E8F0"/>
             </a:solidFill>
             <a:prstDash val="solid"/>
           </a:ln>
@@ -9512,7 +9512,7 @@
         </p:nvSpPr>
         <p:spPr>
           <a:xfrm>
-            <a:off x="6355080" y="1700784"/>
+            <a:off x="6355080" y="1709928"/>
             <a:ext cx="118872" cy="118872"/>
           </a:xfrm>
           <a:prstGeom prst="ellipse">
@@ -9537,7 +9537,7 @@
         </p:nvSpPr>
         <p:spPr>
           <a:xfrm>
-            <a:off x="6537960" y="1700784"/>
+            <a:off x="6537960" y="1709928"/>
             <a:ext cx="118872" cy="118872"/>
           </a:xfrm>
           <a:prstGeom prst="ellipse">
@@ -9562,7 +9562,7 @@
         </p:nvSpPr>
         <p:spPr>
           <a:xfrm>
-            <a:off x="6720840" y="1700784"/>
+            <a:off x="6720840" y="1709928"/>
             <a:ext cx="118872" cy="118872"/>
           </a:xfrm>
           <a:prstGeom prst="ellipse">
@@ -9588,17 +9588,17 @@
         <p:spPr>
           <a:xfrm>
             <a:off x="6995160" y="1664208"/>
-            <a:ext cx="4389120" cy="201168"/>
+            <a:ext cx="4389120" cy="219456"/>
           </a:xfrm>
           <a:prstGeom prst="roundRect">
             <a:avLst/>
           </a:prstGeom>
           <a:solidFill>
-            <a:srgbClr val="0F172A"/>
+            <a:srgbClr val="FFFFFF"/>
           </a:solidFill>
           <a:ln w="10160">
             <a:solidFill>
-              <a:srgbClr val="334155"/>
+              <a:srgbClr val="CBD5E1"/>
             </a:solidFill>
             <a:prstDash val="solid"/>
           </a:ln>
@@ -9613,7 +9613,7 @@
         <p:spPr>
           <a:xfrm>
             <a:off x="7086600" y="1664208"/>
-            <a:ext cx="4206240" cy="201168"/>
+            <a:ext cx="4206240" cy="219456"/>
           </a:xfrm>
           <a:prstGeom prst="rect">
             <a:avLst/>
@@ -9629,7 +9629,7 @@
               <a:buNone/>
             </a:pPr>
             <a:r>
-              <a:rPr lang="en-US" sz="750" dirty="0">
+              <a:rPr lang="en-US" sz="800" dirty="0">
                 <a:solidFill>
                   <a:srgbClr val="64748B"/>
                 </a:solidFill>
@@ -9637,9 +9637,9 @@
                 <a:ea typeface="Arial" pitchFamily="34" charset="-122"/>
                 <a:cs typeface="Arial" pitchFamily="34" charset="-120"/>
               </a:rPr>
-              <a:t>https://belajarplus.id/admin</a:t>
-            </a:r>
-            <a:endParaRPr lang="en-US" sz="750" dirty="0"/>
+              <a:t>🔒 https://belajarplus.id/admin</a:t>
+            </a:r>
+            <a:endParaRPr lang="en-US" sz="800" dirty="0"/>
           </a:p>
         </p:txBody>
       </p:sp>
@@ -9658,8 +9658,8 @@
         </p:blipFill>
         <p:spPr>
           <a:xfrm>
-            <a:off x="6263640" y="1938528"/>
-            <a:ext cx="5212080" cy="4187952"/>
+            <a:off x="6263640" y="1965960"/>
+            <a:ext cx="5212080" cy="4160520"/>
           </a:xfrm>
           <a:prstGeom prst="rect">
             <a:avLst/>
@@ -9680,7 +9680,7 @@
     <p:bg>
       <p:bgPr>
         <a:solidFill>
-          <a:srgbClr val="0A0F1D"/>
+          <a:srgbClr val="F8FAFC"/>
         </a:solidFill>
       </p:bgPr>
     </p:bg>
@@ -9713,11 +9713,11 @@
             <a:avLst/>
           </a:prstGeom>
           <a:solidFill>
-            <a:srgbClr val="2563EB"/>
+            <a:srgbClr val="0284C7"/>
           </a:solidFill>
           <a:ln w="12700">
             <a:solidFill>
-              <a:srgbClr val="2563EB"/>
+              <a:srgbClr val="0284C7"/>
             </a:solidFill>
             <a:prstDash val="solid"/>
           </a:ln>
@@ -9739,8 +9739,8 @@
         </p:blipFill>
         <p:spPr>
           <a:xfrm>
-            <a:off x="640080" y="228600"/>
-            <a:ext cx="1828800" cy="457200"/>
+            <a:off x="640080" y="201168"/>
+            <a:ext cx="1920240" cy="475488"/>
           </a:xfrm>
           <a:prstGeom prst="rect">
             <a:avLst/>
@@ -9755,32 +9755,96 @@
         </p:nvSpPr>
         <p:spPr>
           <a:xfrm>
-            <a:off x="2743200" y="274320"/>
+            <a:off x="2834640" y="256032"/>
+            <a:ext cx="3017520" cy="347472"/>
+          </a:xfrm>
+          <a:prstGeom prst="roundRect">
+            <a:avLst/>
+          </a:prstGeom>
+          <a:solidFill>
+            <a:srgbClr val="E0F2FE"/>
+          </a:solidFill>
+          <a:ln w="15240">
+            <a:solidFill>
+              <a:srgbClr val="BAE6FD"/>
+            </a:solidFill>
+            <a:prstDash val="solid"/>
+          </a:ln>
+        </p:spPr>
+      </p:sp>
+      <p:sp>
+        <p:nvSpPr>
+          <p:cNvPr id="5" name="Text 2"/>
+          <p:cNvSpPr/>
+          <p:nvPr/>
+        </p:nvSpPr>
+        <p:spPr>
+          <a:xfrm>
+            <a:off x="2834640" y="256032"/>
+            <a:ext cx="3017520" cy="347472"/>
+          </a:xfrm>
+          <a:prstGeom prst="rect">
+            <a:avLst/>
+          </a:prstGeom>
+          <a:noFill/>
+          <a:ln/>
+        </p:spPr>
+        <p:txBody>
+          <a:bodyPr wrap="square" rtlCol="0" anchor="ctr"/>
+          <a:lstStyle/>
+          <a:p>
+            <a:pPr algn="ctr" indent="0" marL="0">
+              <a:buNone/>
+            </a:pPr>
+            <a:r>
+              <a:rPr lang="en-US" sz="950" b="1" dirty="0">
+                <a:solidFill>
+                  <a:srgbClr val="0369A1"/>
+                </a:solidFill>
+                <a:latin typeface="Arial" pitchFamily="34" charset="0"/>
+                <a:ea typeface="Arial" pitchFamily="34" charset="-122"/>
+                <a:cs typeface="Arial" pitchFamily="34" charset="-120"/>
+              </a:rPr>
+              <a:t>EFISIENSI GURU &amp; MUTU</a:t>
+            </a:r>
+            <a:endParaRPr lang="en-US" sz="950" dirty="0"/>
+          </a:p>
+        </p:txBody>
+      </p:sp>
+      <p:sp>
+        <p:nvSpPr>
+          <p:cNvPr id="6" name="Shape 3"/>
+          <p:cNvSpPr/>
+          <p:nvPr/>
+        </p:nvSpPr>
+        <p:spPr>
+          <a:xfrm>
+            <a:off x="8595360" y="256032"/>
             <a:ext cx="2926080" cy="347472"/>
           </a:xfrm>
           <a:prstGeom prst="roundRect">
             <a:avLst/>
           </a:prstGeom>
           <a:solidFill>
-            <a:srgbClr val="0F172A"/>
+            <a:srgbClr val="FEF3C7"/>
           </a:solidFill>
           <a:ln w="15240">
             <a:solidFill>
-              <a:srgbClr val="2563EB"/>
-            </a:solidFill>
-            <a:prstDash val="solid"/>
-          </a:ln>
-        </p:spPr>
-      </p:sp>
-      <p:sp>
-        <p:nvSpPr>
-          <p:cNvPr id="5" name="Text 2"/>
-          <p:cNvSpPr/>
-          <p:nvPr/>
-        </p:nvSpPr>
-        <p:spPr>
-          <a:xfrm>
-            <a:off x="2743200" y="274320"/>
+              <a:srgbClr val="FCD34D"/>
+            </a:solidFill>
+            <a:prstDash val="solid"/>
+          </a:ln>
+        </p:spPr>
+      </p:sp>
+      <p:sp>
+        <p:nvSpPr>
+          <p:cNvPr id="7" name="Text 4"/>
+          <p:cNvSpPr/>
+          <p:nvPr/>
+        </p:nvSpPr>
+        <p:spPr>
+          <a:xfrm>
+            <a:off x="8595360" y="256032"/>
             <a:ext cx="2926080" cy="347472"/>
           </a:xfrm>
           <a:prstGeom prst="rect">
@@ -9797,73 +9861,9 @@
               <a:buNone/>
             </a:pPr>
             <a:r>
-              <a:rPr lang="en-US" sz="900" b="1" dirty="0">
-                <a:solidFill>
-                  <a:srgbClr val="38BDF8"/>
-                </a:solidFill>
-                <a:latin typeface="Arial" pitchFamily="34" charset="0"/>
-                <a:ea typeface="Arial" pitchFamily="34" charset="-122"/>
-                <a:cs typeface="Arial" pitchFamily="34" charset="-120"/>
-              </a:rPr>
-              <a:t>EFISIENSI GURU &amp; MUTU</a:t>
-            </a:r>
-            <a:endParaRPr lang="en-US" sz="900" dirty="0"/>
-          </a:p>
-        </p:txBody>
-      </p:sp>
-      <p:sp>
-        <p:nvSpPr>
-          <p:cNvPr id="6" name="Shape 3"/>
-          <p:cNvSpPr/>
-          <p:nvPr/>
-        </p:nvSpPr>
-        <p:spPr>
-          <a:xfrm>
-            <a:off x="8778240" y="274320"/>
-            <a:ext cx="2743200" cy="347472"/>
-          </a:xfrm>
-          <a:prstGeom prst="roundRect">
-            <a:avLst/>
-          </a:prstGeom>
-          <a:solidFill>
-            <a:srgbClr val="1C1917"/>
-          </a:solidFill>
-          <a:ln w="15240">
-            <a:solidFill>
-              <a:srgbClr val="F59E0B"/>
-            </a:solidFill>
-            <a:prstDash val="solid"/>
-          </a:ln>
-        </p:spPr>
-      </p:sp>
-      <p:sp>
-        <p:nvSpPr>
-          <p:cNvPr id="7" name="Text 4"/>
-          <p:cNvSpPr/>
-          <p:nvPr/>
-        </p:nvSpPr>
-        <p:spPr>
-          <a:xfrm>
-            <a:off x="8778240" y="274320"/>
-            <a:ext cx="2743200" cy="347472"/>
-          </a:xfrm>
-          <a:prstGeom prst="rect">
-            <a:avLst/>
-          </a:prstGeom>
-          <a:noFill/>
-          <a:ln/>
-        </p:spPr>
-        <p:txBody>
-          <a:bodyPr wrap="square" rtlCol="0" anchor="ctr"/>
-          <a:lstStyle/>
-          <a:p>
-            <a:pPr algn="ctr" indent="0" marL="0">
-              <a:buNone/>
-            </a:pPr>
-            <a:r>
-              <a:rPr lang="en-US" sz="900" b="1" dirty="0">
-                <a:solidFill>
-                  <a:srgbClr val="F59E0B"/>
+              <a:rPr lang="en-US" sz="950" b="1" dirty="0">
+                <a:solidFill>
+                  <a:srgbClr val="D97706"/>
                 </a:solidFill>
                 <a:latin typeface="Arial" pitchFamily="34" charset="0"/>
                 <a:ea typeface="Arial" pitchFamily="34" charset="-122"/>
@@ -9871,7 +9871,7 @@
               </a:rPr>
               <a:t>👑 Sesi Khusus Kepala Sekolah</a:t>
             </a:r>
-            <a:endParaRPr lang="en-US" sz="900" dirty="0"/>
+            <a:endParaRPr lang="en-US" sz="950" dirty="0"/>
           </a:p>
         </p:txBody>
       </p:sp>
@@ -9902,7 +9902,7 @@
             <a:r>
               <a:rPr lang="en-US" sz="2200" b="1" dirty="0">
                 <a:solidFill>
-                  <a:srgbClr val="FFFFFF"/>
+                  <a:srgbClr val="0F172A"/>
                 </a:solidFill>
                 <a:latin typeface="Arial" pitchFamily="34" charset="0"/>
                 <a:ea typeface="Arial" pitchFamily="34" charset="-122"/>
@@ -9931,7 +9931,7 @@
           <a:noFill/>
           <a:ln w="15240">
             <a:solidFill>
-              <a:srgbClr val="1E293B"/>
+              <a:srgbClr val="E2E8F0"/>
             </a:solidFill>
             <a:prstDash val="solid"/>
           </a:ln>
@@ -10003,7 +10003,7 @@
             <a:r>
               <a:rPr lang="en-US" sz="900" b="1" dirty="0">
                 <a:solidFill>
-                  <a:srgbClr val="94A3B8"/>
+                  <a:srgbClr val="0369A1"/>
                 </a:solidFill>
                 <a:latin typeface="Arial" pitchFamily="34" charset="0"/>
                 <a:ea typeface="Arial" pitchFamily="34" charset="-122"/>
@@ -10030,11 +10030,11 @@
             <a:avLst/>
           </a:prstGeom>
           <a:solidFill>
-            <a:srgbClr val="131E32"/>
+            <a:srgbClr val="FFFFFF"/>
           </a:solidFill>
           <a:ln w="15240">
             <a:solidFill>
-              <a:srgbClr val="1E293B"/>
+              <a:srgbClr val="CBD5E1"/>
             </a:solidFill>
             <a:prstDash val="solid"/>
           </a:ln>
@@ -10067,7 +10067,7 @@
             <a:r>
               <a:rPr lang="en-US" sz="1400" b="1" dirty="0">
                 <a:solidFill>
-                  <a:srgbClr val="38BDF8"/>
+                  <a:srgbClr val="0369A1"/>
                 </a:solidFill>
                 <a:latin typeface="Arial" pitchFamily="34" charset="0"/>
                 <a:ea typeface="Arial" pitchFamily="34" charset="-122"/>
@@ -10109,7 +10109,7 @@
             <a:r>
               <a:rPr lang="en-US" sz="1100" b="1" dirty="0">
                 <a:solidFill>
-                  <a:srgbClr val="FFFFFF"/>
+                  <a:srgbClr val="0F172A"/>
                 </a:solidFill>
                 <a:latin typeface="Arial" pitchFamily="34" charset="0"/>
                 <a:ea typeface="Arial" pitchFamily="34" charset="-122"/>
@@ -10127,7 +10127,7 @@
             <a:r>
               <a:rPr lang="en-US" sz="1000" dirty="0">
                 <a:solidFill>
-                  <a:srgbClr val="94A3B8"/>
+                  <a:srgbClr val="334155"/>
                 </a:solidFill>
                 <a:latin typeface="Arial" pitchFamily="34" charset="0"/>
                 <a:ea typeface="Arial" pitchFamily="34" charset="-122"/>
@@ -10145,7 +10145,7 @@
             <a:r>
               <a:rPr lang="en-US" sz="1100" b="1" dirty="0">
                 <a:solidFill>
-                  <a:srgbClr val="FFFFFF"/>
+                  <a:srgbClr val="0F172A"/>
                 </a:solidFill>
                 <a:latin typeface="Arial" pitchFamily="34" charset="0"/>
                 <a:ea typeface="Arial" pitchFamily="34" charset="-122"/>
@@ -10163,7 +10163,7 @@
             <a:r>
               <a:rPr lang="en-US" sz="1000" dirty="0">
                 <a:solidFill>
-                  <a:srgbClr val="94A3B8"/>
+                  <a:srgbClr val="334155"/>
                 </a:solidFill>
                 <a:latin typeface="Arial" pitchFamily="34" charset="0"/>
                 <a:ea typeface="Arial" pitchFamily="34" charset="-122"/>
@@ -10181,7 +10181,7 @@
             <a:r>
               <a:rPr lang="en-US" sz="1100" b="1" dirty="0">
                 <a:solidFill>
-                  <a:srgbClr val="FFFFFF"/>
+                  <a:srgbClr val="0F172A"/>
                 </a:solidFill>
                 <a:latin typeface="Arial" pitchFamily="34" charset="0"/>
                 <a:ea typeface="Arial" pitchFamily="34" charset="-122"/>
@@ -10199,7 +10199,7 @@
             <a:r>
               <a:rPr lang="en-US" sz="1000" dirty="0">
                 <a:solidFill>
-                  <a:srgbClr val="94A3B8"/>
+                  <a:srgbClr val="334155"/>
                 </a:solidFill>
                 <a:latin typeface="Arial" pitchFamily="34" charset="0"/>
                 <a:ea typeface="Arial" pitchFamily="34" charset="-122"/>
@@ -10226,11 +10226,11 @@
             <a:avLst/>
           </a:prstGeom>
           <a:solidFill>
-            <a:srgbClr val="0F172A"/>
+            <a:srgbClr val="FFFFFF"/>
           </a:solidFill>
           <a:ln w="19050">
             <a:solidFill>
-              <a:srgbClr val="334155"/>
+              <a:srgbClr val="CBD5E1"/>
             </a:solidFill>
             <a:prstDash val="solid"/>
           </a:ln>
@@ -10245,17 +10245,17 @@
         <p:spPr>
           <a:xfrm>
             <a:off x="6217920" y="1600200"/>
-            <a:ext cx="5303520" cy="320040"/>
-          </a:xfrm>
-          <a:prstGeom prst="rect">
-            <a:avLst/>
-          </a:prstGeom>
-          <a:solidFill>
-            <a:srgbClr val="1E293B"/>
+            <a:ext cx="5303520" cy="347472"/>
+          </a:xfrm>
+          <a:prstGeom prst="rect">
+            <a:avLst/>
+          </a:prstGeom>
+          <a:solidFill>
+            <a:srgbClr val="F1F5F9"/>
           </a:solidFill>
           <a:ln w="12700">
             <a:solidFill>
-              <a:srgbClr val="1E293B"/>
+              <a:srgbClr val="E2E8F0"/>
             </a:solidFill>
             <a:prstDash val="solid"/>
           </a:ln>
@@ -10269,7 +10269,7 @@
         </p:nvSpPr>
         <p:spPr>
           <a:xfrm>
-            <a:off x="6355080" y="1700784"/>
+            <a:off x="6355080" y="1709928"/>
             <a:ext cx="118872" cy="118872"/>
           </a:xfrm>
           <a:prstGeom prst="ellipse">
@@ -10294,7 +10294,7 @@
         </p:nvSpPr>
         <p:spPr>
           <a:xfrm>
-            <a:off x="6537960" y="1700784"/>
+            <a:off x="6537960" y="1709928"/>
             <a:ext cx="118872" cy="118872"/>
           </a:xfrm>
           <a:prstGeom prst="ellipse">
@@ -10319,7 +10319,7 @@
         </p:nvSpPr>
         <p:spPr>
           <a:xfrm>
-            <a:off x="6720840" y="1700784"/>
+            <a:off x="6720840" y="1709928"/>
             <a:ext cx="118872" cy="118872"/>
           </a:xfrm>
           <a:prstGeom prst="ellipse">
@@ -10345,17 +10345,17 @@
         <p:spPr>
           <a:xfrm>
             <a:off x="6995160" y="1664208"/>
-            <a:ext cx="4389120" cy="201168"/>
+            <a:ext cx="4389120" cy="219456"/>
           </a:xfrm>
           <a:prstGeom prst="roundRect">
             <a:avLst/>
           </a:prstGeom>
           <a:solidFill>
-            <a:srgbClr val="0F172A"/>
+            <a:srgbClr val="FFFFFF"/>
           </a:solidFill>
           <a:ln w="10160">
             <a:solidFill>
-              <a:srgbClr val="334155"/>
+              <a:srgbClr val="CBD5E1"/>
             </a:solidFill>
             <a:prstDash val="solid"/>
           </a:ln>
@@ -10370,7 +10370,7 @@
         <p:spPr>
           <a:xfrm>
             <a:off x="7086600" y="1664208"/>
-            <a:ext cx="4206240" cy="201168"/>
+            <a:ext cx="4206240" cy="219456"/>
           </a:xfrm>
           <a:prstGeom prst="rect">
             <a:avLst/>
@@ -10386,7 +10386,7 @@
               <a:buNone/>
             </a:pPr>
             <a:r>
-              <a:rPr lang="en-US" sz="750" dirty="0">
+              <a:rPr lang="en-US" sz="800" dirty="0">
                 <a:solidFill>
                   <a:srgbClr val="64748B"/>
                 </a:solidFill>
@@ -10394,9 +10394,9 @@
                 <a:ea typeface="Arial" pitchFamily="34" charset="-122"/>
                 <a:cs typeface="Arial" pitchFamily="34" charset="-120"/>
               </a:rPr>
-              <a:t>https://belajarplus.id/admin</a:t>
-            </a:r>
-            <a:endParaRPr lang="en-US" sz="750" dirty="0"/>
+              <a:t>🔒 https://belajarplus.id/admin</a:t>
+            </a:r>
+            <a:endParaRPr lang="en-US" sz="800" dirty="0"/>
           </a:p>
         </p:txBody>
       </p:sp>
@@ -10415,8 +10415,8 @@
         </p:blipFill>
         <p:spPr>
           <a:xfrm>
-            <a:off x="6263640" y="1938528"/>
-            <a:ext cx="5212080" cy="4187952"/>
+            <a:off x="6263640" y="1965960"/>
+            <a:ext cx="5212080" cy="4160520"/>
           </a:xfrm>
           <a:prstGeom prst="rect">
             <a:avLst/>
@@ -10437,7 +10437,7 @@
     <p:bg>
       <p:bgPr>
         <a:solidFill>
-          <a:srgbClr val="0A0F1D"/>
+          <a:srgbClr val="F8FAFC"/>
         </a:solidFill>
       </p:bgPr>
     </p:bg>
@@ -10470,11 +10470,11 @@
             <a:avLst/>
           </a:prstGeom>
           <a:solidFill>
-            <a:srgbClr val="2563EB"/>
+            <a:srgbClr val="0284C7"/>
           </a:solidFill>
           <a:ln w="12700">
             <a:solidFill>
-              <a:srgbClr val="2563EB"/>
+              <a:srgbClr val="0284C7"/>
             </a:solidFill>
             <a:prstDash val="solid"/>
           </a:ln>
@@ -10496,8 +10496,8 @@
         </p:blipFill>
         <p:spPr>
           <a:xfrm>
-            <a:off x="640080" y="228600"/>
-            <a:ext cx="1828800" cy="457200"/>
+            <a:off x="640080" y="201168"/>
+            <a:ext cx="1920240" cy="475488"/>
           </a:xfrm>
           <a:prstGeom prst="rect">
             <a:avLst/>
@@ -10512,32 +10512,96 @@
         </p:nvSpPr>
         <p:spPr>
           <a:xfrm>
-            <a:off x="2743200" y="274320"/>
+            <a:off x="2834640" y="256032"/>
+            <a:ext cx="3017520" cy="347472"/>
+          </a:xfrm>
+          <a:prstGeom prst="roundRect">
+            <a:avLst/>
+          </a:prstGeom>
+          <a:solidFill>
+            <a:srgbClr val="E0F2FE"/>
+          </a:solidFill>
+          <a:ln w="15240">
+            <a:solidFill>
+              <a:srgbClr val="BAE6FD"/>
+            </a:solidFill>
+            <a:prstDash val="solid"/>
+          </a:ln>
+        </p:spPr>
+      </p:sp>
+      <p:sp>
+        <p:nvSpPr>
+          <p:cNvPr id="5" name="Text 2"/>
+          <p:cNvSpPr/>
+          <p:nvPr/>
+        </p:nvSpPr>
+        <p:spPr>
+          <a:xfrm>
+            <a:off x="2834640" y="256032"/>
+            <a:ext cx="3017520" cy="347472"/>
+          </a:xfrm>
+          <a:prstGeom prst="rect">
+            <a:avLst/>
+          </a:prstGeom>
+          <a:noFill/>
+          <a:ln/>
+        </p:spPr>
+        <p:txBody>
+          <a:bodyPr wrap="square" rtlCol="0" anchor="ctr"/>
+          <a:lstStyle/>
+          <a:p>
+            <a:pPr algn="ctr" indent="0" marL="0">
+              <a:buNone/>
+            </a:pPr>
+            <a:r>
+              <a:rPr lang="en-US" sz="950" b="1" dirty="0">
+                <a:solidFill>
+                  <a:srgbClr val="0369A1"/>
+                </a:solidFill>
+                <a:latin typeface="Arial" pitchFamily="34" charset="0"/>
+                <a:ea typeface="Arial" pitchFamily="34" charset="-122"/>
+                <a:cs typeface="Arial" pitchFamily="34" charset="-120"/>
+              </a:rPr>
+              <a:t>NILAI STRATEGIS</a:t>
+            </a:r>
+            <a:endParaRPr lang="en-US" sz="950" dirty="0"/>
+          </a:p>
+        </p:txBody>
+      </p:sp>
+      <p:sp>
+        <p:nvSpPr>
+          <p:cNvPr id="6" name="Shape 3"/>
+          <p:cNvSpPr/>
+          <p:nvPr/>
+        </p:nvSpPr>
+        <p:spPr>
+          <a:xfrm>
+            <a:off x="8595360" y="256032"/>
             <a:ext cx="2926080" cy="347472"/>
           </a:xfrm>
           <a:prstGeom prst="roundRect">
             <a:avLst/>
           </a:prstGeom>
           <a:solidFill>
-            <a:srgbClr val="0F172A"/>
+            <a:srgbClr val="FEF3C7"/>
           </a:solidFill>
           <a:ln w="15240">
             <a:solidFill>
-              <a:srgbClr val="2563EB"/>
-            </a:solidFill>
-            <a:prstDash val="solid"/>
-          </a:ln>
-        </p:spPr>
-      </p:sp>
-      <p:sp>
-        <p:nvSpPr>
-          <p:cNvPr id="5" name="Text 2"/>
-          <p:cNvSpPr/>
-          <p:nvPr/>
-        </p:nvSpPr>
-        <p:spPr>
-          <a:xfrm>
-            <a:off x="2743200" y="274320"/>
+              <a:srgbClr val="FCD34D"/>
+            </a:solidFill>
+            <a:prstDash val="solid"/>
+          </a:ln>
+        </p:spPr>
+      </p:sp>
+      <p:sp>
+        <p:nvSpPr>
+          <p:cNvPr id="7" name="Text 4"/>
+          <p:cNvSpPr/>
+          <p:nvPr/>
+        </p:nvSpPr>
+        <p:spPr>
+          <a:xfrm>
+            <a:off x="8595360" y="256032"/>
             <a:ext cx="2926080" cy="347472"/>
           </a:xfrm>
           <a:prstGeom prst="rect">
@@ -10554,73 +10618,9 @@
               <a:buNone/>
             </a:pPr>
             <a:r>
-              <a:rPr lang="en-US" sz="900" b="1" dirty="0">
-                <a:solidFill>
-                  <a:srgbClr val="38BDF8"/>
-                </a:solidFill>
-                <a:latin typeface="Arial" pitchFamily="34" charset="0"/>
-                <a:ea typeface="Arial" pitchFamily="34" charset="-122"/>
-                <a:cs typeface="Arial" pitchFamily="34" charset="-120"/>
-              </a:rPr>
-              <a:t>NILAI STRATEGIS</a:t>
-            </a:r>
-            <a:endParaRPr lang="en-US" sz="900" dirty="0"/>
-          </a:p>
-        </p:txBody>
-      </p:sp>
-      <p:sp>
-        <p:nvSpPr>
-          <p:cNvPr id="6" name="Shape 3"/>
-          <p:cNvSpPr/>
-          <p:nvPr/>
-        </p:nvSpPr>
-        <p:spPr>
-          <a:xfrm>
-            <a:off x="8778240" y="274320"/>
-            <a:ext cx="2743200" cy="347472"/>
-          </a:xfrm>
-          <a:prstGeom prst="roundRect">
-            <a:avLst/>
-          </a:prstGeom>
-          <a:solidFill>
-            <a:srgbClr val="1C1917"/>
-          </a:solidFill>
-          <a:ln w="15240">
-            <a:solidFill>
-              <a:srgbClr val="F59E0B"/>
-            </a:solidFill>
-            <a:prstDash val="solid"/>
-          </a:ln>
-        </p:spPr>
-      </p:sp>
-      <p:sp>
-        <p:nvSpPr>
-          <p:cNvPr id="7" name="Text 4"/>
-          <p:cNvSpPr/>
-          <p:nvPr/>
-        </p:nvSpPr>
-        <p:spPr>
-          <a:xfrm>
-            <a:off x="8778240" y="274320"/>
-            <a:ext cx="2743200" cy="347472"/>
-          </a:xfrm>
-          <a:prstGeom prst="rect">
-            <a:avLst/>
-          </a:prstGeom>
-          <a:noFill/>
-          <a:ln/>
-        </p:spPr>
-        <p:txBody>
-          <a:bodyPr wrap="square" rtlCol="0" anchor="ctr"/>
-          <a:lstStyle/>
-          <a:p>
-            <a:pPr algn="ctr" indent="0" marL="0">
-              <a:buNone/>
-            </a:pPr>
-            <a:r>
-              <a:rPr lang="en-US" sz="900" b="1" dirty="0">
-                <a:solidFill>
-                  <a:srgbClr val="F59E0B"/>
+              <a:rPr lang="en-US" sz="950" b="1" dirty="0">
+                <a:solidFill>
+                  <a:srgbClr val="D97706"/>
                 </a:solidFill>
                 <a:latin typeface="Arial" pitchFamily="34" charset="0"/>
                 <a:ea typeface="Arial" pitchFamily="34" charset="-122"/>
@@ -10628,7 +10628,7 @@
               </a:rPr>
               <a:t>👑 Sesi Khusus Kepala Sekolah</a:t>
             </a:r>
-            <a:endParaRPr lang="en-US" sz="900" dirty="0"/>
+            <a:endParaRPr lang="en-US" sz="950" dirty="0"/>
           </a:p>
         </p:txBody>
       </p:sp>
@@ -10659,7 +10659,7 @@
             <a:r>
               <a:rPr lang="en-US" sz="2200" b="1" dirty="0">
                 <a:solidFill>
-                  <a:srgbClr val="FFFFFF"/>
+                  <a:srgbClr val="0F172A"/>
                 </a:solidFill>
                 <a:latin typeface="Arial" pitchFamily="34" charset="0"/>
                 <a:ea typeface="Arial" pitchFamily="34" charset="-122"/>
@@ -10688,7 +10688,7 @@
           <a:noFill/>
           <a:ln w="15240">
             <a:solidFill>
-              <a:srgbClr val="1E293B"/>
+              <a:srgbClr val="E2E8F0"/>
             </a:solidFill>
             <a:prstDash val="solid"/>
           </a:ln>
@@ -10760,7 +10760,7 @@
             <a:r>
               <a:rPr lang="en-US" sz="900" b="1" dirty="0">
                 <a:solidFill>
-                  <a:srgbClr val="94A3B8"/>
+                  <a:srgbClr val="0369A1"/>
                 </a:solidFill>
                 <a:latin typeface="Arial" pitchFamily="34" charset="0"/>
                 <a:ea typeface="Arial" pitchFamily="34" charset="-122"/>
@@ -10787,11 +10787,11 @@
             <a:avLst/>
           </a:prstGeom>
           <a:solidFill>
-            <a:srgbClr val="131E32"/>
+            <a:srgbClr val="FFFFFF"/>
           </a:solidFill>
           <a:ln w="19050">
             <a:solidFill>
-              <a:srgbClr val="38BDF8"/>
+              <a:srgbClr val="0284C7"/>
             </a:solidFill>
             <a:prstDash val="solid"/>
           </a:ln>
@@ -10824,7 +10824,7 @@
             <a:r>
               <a:rPr lang="en-US" sz="1350" b="1" dirty="0">
                 <a:solidFill>
-                  <a:srgbClr val="FFFFFF"/>
+                  <a:srgbClr val="0F172A"/>
                 </a:solidFill>
                 <a:latin typeface="Arial" pitchFamily="34" charset="0"/>
                 <a:ea typeface="Arial" pitchFamily="34" charset="-122"/>
@@ -10866,7 +10866,7 @@
             <a:r>
               <a:rPr lang="en-US" sz="1050" dirty="0">
                 <a:solidFill>
-                  <a:srgbClr val="94A3B8"/>
+                  <a:srgbClr val="334155"/>
                 </a:solidFill>
                 <a:latin typeface="Arial" pitchFamily="34" charset="0"/>
                 <a:ea typeface="Arial" pitchFamily="34" charset="-122"/>
@@ -10893,11 +10893,11 @@
             <a:avLst/>
           </a:prstGeom>
           <a:solidFill>
-            <a:srgbClr val="131E32"/>
+            <a:srgbClr val="FFFFFF"/>
           </a:solidFill>
           <a:ln w="19050">
             <a:solidFill>
-              <a:srgbClr val="10B981"/>
+              <a:srgbClr val="059669"/>
             </a:solidFill>
             <a:prstDash val="solid"/>
           </a:ln>
@@ -10930,7 +10930,7 @@
             <a:r>
               <a:rPr lang="en-US" sz="1350" b="1" dirty="0">
                 <a:solidFill>
-                  <a:srgbClr val="FFFFFF"/>
+                  <a:srgbClr val="0F172A"/>
                 </a:solidFill>
                 <a:latin typeface="Arial" pitchFamily="34" charset="0"/>
                 <a:ea typeface="Arial" pitchFamily="34" charset="-122"/>
@@ -10972,7 +10972,7 @@
             <a:r>
               <a:rPr lang="en-US" sz="1050" dirty="0">
                 <a:solidFill>
-                  <a:srgbClr val="94A3B8"/>
+                  <a:srgbClr val="334155"/>
                 </a:solidFill>
                 <a:latin typeface="Arial" pitchFamily="34" charset="0"/>
                 <a:ea typeface="Arial" pitchFamily="34" charset="-122"/>
@@ -10999,11 +10999,11 @@
             <a:avLst/>
           </a:prstGeom>
           <a:solidFill>
-            <a:srgbClr val="131E32"/>
+            <a:srgbClr val="FFFFFF"/>
           </a:solidFill>
           <a:ln w="19050">
             <a:solidFill>
-              <a:srgbClr val="F59E0B"/>
+              <a:srgbClr val="D97706"/>
             </a:solidFill>
             <a:prstDash val="solid"/>
           </a:ln>
@@ -11036,7 +11036,7 @@
             <a:r>
               <a:rPr lang="en-US" sz="1350" b="1" dirty="0">
                 <a:solidFill>
-                  <a:srgbClr val="FFFFFF"/>
+                  <a:srgbClr val="0F172A"/>
                 </a:solidFill>
                 <a:latin typeface="Arial" pitchFamily="34" charset="0"/>
                 <a:ea typeface="Arial" pitchFamily="34" charset="-122"/>
@@ -11078,7 +11078,7 @@
             <a:r>
               <a:rPr lang="en-US" sz="1050" dirty="0">
                 <a:solidFill>
-                  <a:srgbClr val="94A3B8"/>
+                  <a:srgbClr val="334155"/>
                 </a:solidFill>
                 <a:latin typeface="Arial" pitchFamily="34" charset="0"/>
                 <a:ea typeface="Arial" pitchFamily="34" charset="-122"/>
@@ -11105,11 +11105,11 @@
             <a:avLst/>
           </a:prstGeom>
           <a:solidFill>
-            <a:srgbClr val="131E32"/>
+            <a:srgbClr val="FFFFFF"/>
           </a:solidFill>
           <a:ln w="19050">
             <a:solidFill>
-              <a:srgbClr val="8B5CF6"/>
+              <a:srgbClr val="7C3AED"/>
             </a:solidFill>
             <a:prstDash val="solid"/>
           </a:ln>
@@ -11142,7 +11142,7 @@
             <a:r>
               <a:rPr lang="en-US" sz="1350" b="1" dirty="0">
                 <a:solidFill>
-                  <a:srgbClr val="FFFFFF"/>
+                  <a:srgbClr val="0F172A"/>
                 </a:solidFill>
                 <a:latin typeface="Arial" pitchFamily="34" charset="0"/>
                 <a:ea typeface="Arial" pitchFamily="34" charset="-122"/>
@@ -11184,7 +11184,7 @@
             <a:r>
               <a:rPr lang="en-US" sz="1050" dirty="0">
                 <a:solidFill>
-                  <a:srgbClr val="94A3B8"/>
+                  <a:srgbClr val="334155"/>
                 </a:solidFill>
                 <a:latin typeface="Arial" pitchFamily="34" charset="0"/>
                 <a:ea typeface="Arial" pitchFamily="34" charset="-122"/>
